--- a/prednasky/01_elektronicke_soucastky_v2026.pptx
+++ b/prednasky/01_elektronicke_soucastky_v2026.pptx
@@ -5,7 +5,7 @@
     <p:sldMasterId id="2147483648" r:id="rId1"/>
   </p:sldMasterIdLst>
   <p:notesMasterIdLst>
-    <p:notesMasterId r:id="rId63"/>
+    <p:notesMasterId r:id="rId64"/>
   </p:notesMasterIdLst>
   <p:sldIdLst>
     <p:sldId id="256" r:id="rId2"/>
@@ -52,23 +52,24 @@
     <p:sldId id="294" r:id="rId43"/>
     <p:sldId id="295" r:id="rId44"/>
     <p:sldId id="296" r:id="rId45"/>
-    <p:sldId id="297" r:id="rId46"/>
-    <p:sldId id="298" r:id="rId47"/>
-    <p:sldId id="299" r:id="rId48"/>
-    <p:sldId id="300" r:id="rId49"/>
-    <p:sldId id="360" r:id="rId50"/>
-    <p:sldId id="301" r:id="rId51"/>
-    <p:sldId id="302" r:id="rId52"/>
-    <p:sldId id="303" r:id="rId53"/>
-    <p:sldId id="304" r:id="rId54"/>
-    <p:sldId id="305" r:id="rId55"/>
-    <p:sldId id="306" r:id="rId56"/>
-    <p:sldId id="307" r:id="rId57"/>
-    <p:sldId id="308" r:id="rId58"/>
-    <p:sldId id="309" r:id="rId59"/>
-    <p:sldId id="310" r:id="rId60"/>
-    <p:sldId id="311" r:id="rId61"/>
-    <p:sldId id="312" r:id="rId62"/>
+    <p:sldId id="361" r:id="rId46"/>
+    <p:sldId id="297" r:id="rId47"/>
+    <p:sldId id="298" r:id="rId48"/>
+    <p:sldId id="299" r:id="rId49"/>
+    <p:sldId id="300" r:id="rId50"/>
+    <p:sldId id="360" r:id="rId51"/>
+    <p:sldId id="301" r:id="rId52"/>
+    <p:sldId id="302" r:id="rId53"/>
+    <p:sldId id="303" r:id="rId54"/>
+    <p:sldId id="304" r:id="rId55"/>
+    <p:sldId id="305" r:id="rId56"/>
+    <p:sldId id="306" r:id="rId57"/>
+    <p:sldId id="307" r:id="rId58"/>
+    <p:sldId id="308" r:id="rId59"/>
+    <p:sldId id="309" r:id="rId60"/>
+    <p:sldId id="310" r:id="rId61"/>
+    <p:sldId id="311" r:id="rId62"/>
+    <p:sldId id="312" r:id="rId63"/>
   </p:sldIdLst>
   <p:sldSz cx="12192000" cy="6858000"/>
   <p:notesSz cx="6858000" cy="12192000"/>
@@ -3701,66 +3702,7 @@
           <a:chExt cx="0" cy="0"/>
         </a:xfrm>
       </p:grpSpPr>
-      <p:sp>
-        <p:nvSpPr>
-          <p:cNvPr id="2" name="Slide Image Placeholder 1"/>
-          <p:cNvSpPr>
-            <a:spLocks noGrp="1" noRot="1" noChangeAspect="1"/>
-          </p:cNvSpPr>
-          <p:nvPr>
-            <p:ph type="sldImg"/>
-          </p:nvPr>
-        </p:nvSpPr>
-        <p:spPr/>
-      </p:sp>
-      <p:sp>
-        <p:nvSpPr>
-          <p:cNvPr id="3" name="Notes Placeholder 2"/>
-          <p:cNvSpPr>
-            <a:spLocks noGrp="1"/>
-          </p:cNvSpPr>
-          <p:nvPr>
-            <p:ph type="body" idx="1"/>
-          </p:nvPr>
-        </p:nvSpPr>
-        <p:spPr/>
-        <p:txBody>
-          <a:bodyPr/>
-          <a:lstStyle/>
-          <a:p>
-            <a:endParaRPr lang="en-US" dirty="0"/>
-          </a:p>
-        </p:txBody>
-      </p:sp>
-      <p:sp>
-        <p:nvSpPr>
-          <p:cNvPr id="4" name="Slide Number Placeholder 3"/>
-          <p:cNvSpPr>
-            <a:spLocks noGrp="1"/>
-          </p:cNvSpPr>
-          <p:nvPr>
-            <p:ph type="sldNum" sz="quarter" idx="10"/>
-          </p:nvPr>
-        </p:nvSpPr>
-        <p:spPr/>
-        <p:txBody>
-          <a:bodyPr/>
-          <a:lstStyle/>
-          <a:p>
-            <a:fld id="{F7021451-1387-4CA6-816F-3879F97B5CBC}" type="slidenum">
-              <a:rPr lang="en-US"/>
-              <a:t>45</a:t>
-            </a:fld>
-            <a:endParaRPr lang="en-US"/>
-          </a:p>
-        </p:txBody>
-      </p:sp>
     </p:spTree>
-    <p:extLst>
-      <p:ext uri="{BB962C8B-B14F-4D97-AF65-F5344CB8AC3E}">
-        <p14:creationId xmlns:p14="http://schemas.microsoft.com/office/powerpoint/2010/main" val="1024086991"/>
-      </p:ext>
-    </p:extLst>
   </p:cSld>
   <p:clrMapOvr>
     <a:masterClrMapping/>
@@ -4037,7 +3979,66 @@
           <a:chExt cx="0" cy="0"/>
         </a:xfrm>
       </p:grpSpPr>
+      <p:sp>
+        <p:nvSpPr>
+          <p:cNvPr id="2" name="Slide Image Placeholder 1"/>
+          <p:cNvSpPr>
+            <a:spLocks noGrp="1" noRot="1" noChangeAspect="1"/>
+          </p:cNvSpPr>
+          <p:nvPr>
+            <p:ph type="sldImg"/>
+          </p:nvPr>
+        </p:nvSpPr>
+        <p:spPr/>
+      </p:sp>
+      <p:sp>
+        <p:nvSpPr>
+          <p:cNvPr id="3" name="Notes Placeholder 2"/>
+          <p:cNvSpPr>
+            <a:spLocks noGrp="1"/>
+          </p:cNvSpPr>
+          <p:nvPr>
+            <p:ph type="body" idx="1"/>
+          </p:nvPr>
+        </p:nvSpPr>
+        <p:spPr/>
+        <p:txBody>
+          <a:bodyPr/>
+          <a:lstStyle/>
+          <a:p>
+            <a:endParaRPr lang="en-US" dirty="0"/>
+          </a:p>
+        </p:txBody>
+      </p:sp>
+      <p:sp>
+        <p:nvSpPr>
+          <p:cNvPr id="4" name="Slide Number Placeholder 3"/>
+          <p:cNvSpPr>
+            <a:spLocks noGrp="1"/>
+          </p:cNvSpPr>
+          <p:nvPr>
+            <p:ph type="sldNum" sz="quarter" idx="10"/>
+          </p:nvPr>
+        </p:nvSpPr>
+        <p:spPr/>
+        <p:txBody>
+          <a:bodyPr/>
+          <a:lstStyle/>
+          <a:p>
+            <a:fld id="{F7021451-1387-4CA6-816F-3879F97B5CBC}" type="slidenum">
+              <a:rPr lang="en-US"/>
+              <a:t>49</a:t>
+            </a:fld>
+            <a:endParaRPr lang="en-US"/>
+          </a:p>
+        </p:txBody>
+      </p:sp>
     </p:spTree>
+    <p:extLst>
+      <p:ext uri="{BB962C8B-B14F-4D97-AF65-F5344CB8AC3E}">
+        <p14:creationId xmlns:p14="http://schemas.microsoft.com/office/powerpoint/2010/main" val="1024086991"/>
+      </p:ext>
+    </p:extLst>
   </p:cSld>
   <p:clrMapOvr>
     <a:masterClrMapping/>
@@ -4062,66 +4063,7 @@
           <a:chExt cx="0" cy="0"/>
         </a:xfrm>
       </p:grpSpPr>
-      <p:sp>
-        <p:nvSpPr>
-          <p:cNvPr id="2" name="Slide Image Placeholder 1"/>
-          <p:cNvSpPr>
-            <a:spLocks noGrp="1" noRot="1" noChangeAspect="1"/>
-          </p:cNvSpPr>
-          <p:nvPr>
-            <p:ph type="sldImg"/>
-          </p:nvPr>
-        </p:nvSpPr>
-        <p:spPr/>
-      </p:sp>
-      <p:sp>
-        <p:nvSpPr>
-          <p:cNvPr id="3" name="Notes Placeholder 2"/>
-          <p:cNvSpPr>
-            <a:spLocks noGrp="1"/>
-          </p:cNvSpPr>
-          <p:nvPr>
-            <p:ph type="body" idx="1"/>
-          </p:nvPr>
-        </p:nvSpPr>
-        <p:spPr/>
-        <p:txBody>
-          <a:bodyPr/>
-          <a:lstStyle/>
-          <a:p>
-            <a:endParaRPr lang="en-US" dirty="0"/>
-          </a:p>
-        </p:txBody>
-      </p:sp>
-      <p:sp>
-        <p:nvSpPr>
-          <p:cNvPr id="4" name="Slide Number Placeholder 3"/>
-          <p:cNvSpPr>
-            <a:spLocks noGrp="1"/>
-          </p:cNvSpPr>
-          <p:nvPr>
-            <p:ph type="sldNum" sz="quarter" idx="10"/>
-          </p:nvPr>
-        </p:nvSpPr>
-        <p:spPr/>
-        <p:txBody>
-          <a:bodyPr/>
-          <a:lstStyle/>
-          <a:p>
-            <a:fld id="{F7021451-1387-4CA6-816F-3879F97B5CBC}" type="slidenum">
-              <a:rPr lang="en-US"/>
-              <a:t>50</a:t>
-            </a:fld>
-            <a:endParaRPr lang="en-US"/>
-          </a:p>
-        </p:txBody>
-      </p:sp>
     </p:spTree>
-    <p:extLst>
-      <p:ext uri="{BB962C8B-B14F-4D97-AF65-F5344CB8AC3E}">
-        <p14:creationId xmlns:p14="http://schemas.microsoft.com/office/powerpoint/2010/main" val="1024086991"/>
-      </p:ext>
-    </p:extLst>
   </p:cSld>
   <p:clrMapOvr>
     <a:masterClrMapping/>
@@ -5203,6 +5145,90 @@
             <a:fld id="{F7021451-1387-4CA6-816F-3879F97B5CBC}" type="slidenum">
               <a:rPr lang="en-US"/>
               <a:t>8</a:t>
+            </a:fld>
+            <a:endParaRPr lang="en-US"/>
+          </a:p>
+        </p:txBody>
+      </p:sp>
+    </p:spTree>
+    <p:extLst>
+      <p:ext uri="{BB962C8B-B14F-4D97-AF65-F5344CB8AC3E}">
+        <p14:creationId xmlns:p14="http://schemas.microsoft.com/office/powerpoint/2010/main" val="1024086991"/>
+      </p:ext>
+    </p:extLst>
+  </p:cSld>
+  <p:clrMapOvr>
+    <a:masterClrMapping/>
+  </p:clrMapOvr>
+</p:notes>
+</file>
+
+<file path=ppt/notesSlides/notesSlide60.xml><?xml version="1.0" encoding="utf-8"?>
+<p:notes xmlns:a="http://schemas.openxmlformats.org/drawingml/2006/main" xmlns:r="http://schemas.openxmlformats.org/officeDocument/2006/relationships" xmlns:p="http://schemas.openxmlformats.org/presentationml/2006/main">
+  <p:cSld>
+    <p:spTree>
+      <p:nvGrpSpPr>
+        <p:cNvPr id="1" name=""/>
+        <p:cNvGrpSpPr/>
+        <p:nvPr/>
+      </p:nvGrpSpPr>
+      <p:grpSpPr>
+        <a:xfrm>
+          <a:off x="0" y="0"/>
+          <a:ext cx="0" cy="0"/>
+          <a:chOff x="0" y="0"/>
+          <a:chExt cx="0" cy="0"/>
+        </a:xfrm>
+      </p:grpSpPr>
+      <p:sp>
+        <p:nvSpPr>
+          <p:cNvPr id="2" name="Slide Image Placeholder 1"/>
+          <p:cNvSpPr>
+            <a:spLocks noGrp="1" noRot="1" noChangeAspect="1"/>
+          </p:cNvSpPr>
+          <p:nvPr>
+            <p:ph type="sldImg"/>
+          </p:nvPr>
+        </p:nvSpPr>
+        <p:spPr/>
+      </p:sp>
+      <p:sp>
+        <p:nvSpPr>
+          <p:cNvPr id="3" name="Notes Placeholder 2"/>
+          <p:cNvSpPr>
+            <a:spLocks noGrp="1"/>
+          </p:cNvSpPr>
+          <p:nvPr>
+            <p:ph type="body" idx="1"/>
+          </p:nvPr>
+        </p:nvSpPr>
+        <p:spPr/>
+        <p:txBody>
+          <a:bodyPr/>
+          <a:lstStyle/>
+          <a:p>
+            <a:endParaRPr lang="en-US" dirty="0"/>
+          </a:p>
+        </p:txBody>
+      </p:sp>
+      <p:sp>
+        <p:nvSpPr>
+          <p:cNvPr id="4" name="Slide Number Placeholder 3"/>
+          <p:cNvSpPr>
+            <a:spLocks noGrp="1"/>
+          </p:cNvSpPr>
+          <p:nvPr>
+            <p:ph type="sldNum" sz="quarter" idx="10"/>
+          </p:nvPr>
+        </p:nvSpPr>
+        <p:spPr/>
+        <p:txBody>
+          <a:bodyPr/>
+          <a:lstStyle/>
+          <a:p>
+            <a:fld id="{F7021451-1387-4CA6-816F-3879F97B5CBC}" type="slidenum">
+              <a:rPr lang="en-US"/>
+              <a:t>62</a:t>
             </a:fld>
             <a:endParaRPr lang="en-US"/>
           </a:p>
@@ -5612,7 +5638,7 @@
           <a:p>
             <a:fld id="{C764DE79-268F-4C1A-8933-263129D2AF90}" type="datetimeFigureOut">
               <a:rPr lang="en-US" smtClean="0"/>
-              <a:t>9/10/2026</a:t>
+              <a:t>9/16/2026</a:t>
             </a:fld>
             <a:endParaRPr lang="en-US"/>
           </a:p>
@@ -32232,7 +32258,7 @@
           <p:nvPr>
             <p:extLst>
               <p:ext uri="{D42A27DB-BD31-4B8C-83A1-F6EECF244321}">
-                <p14:modId xmlns:p14="http://schemas.microsoft.com/office/powerpoint/2010/main" val="481125055"/>
+                <p14:modId xmlns:p14="http://schemas.microsoft.com/office/powerpoint/2010/main" val="3306633248"/>
               </p:ext>
             </p:extLst>
           </p:nvPr>
@@ -34226,12 +34252,12 @@
                       <a:r>
                         <a:rPr lang="cs-CZ" sz="1400" dirty="0">
                           <a:solidFill>
-                            <a:srgbClr val="6B7784"/>
+                            <a:schemeClr val="tx1"/>
                           </a:solidFill>
                           <a:latin typeface="Calibri" pitchFamily="34" charset="0"/>
                           <a:cs typeface="Calibri" pitchFamily="34" charset="-120"/>
                         </a:rPr>
-                        <a:t>—</a:t>
+                        <a:t>Přednáška 4</a:t>
                       </a:r>
                     </a:p>
                   </a:txBody>
@@ -34557,13 +34583,20 @@
                       <a:r>
                         <a:rPr lang="cs-CZ" sz="1400" dirty="0">
                           <a:solidFill>
-                            <a:srgbClr val="1E2A38"/>
+                            <a:srgbClr val="6B7784"/>
                           </a:solidFill>
                           <a:latin typeface="Calibri" pitchFamily="34" charset="0"/>
                           <a:cs typeface="Calibri" pitchFamily="34" charset="-120"/>
                         </a:rPr>
-                        <a:t>Přednáška 4</a:t>
+                        <a:t>—</a:t>
                       </a:r>
+                      <a:endParaRPr lang="cs-CZ" sz="1400" dirty="0">
+                        <a:solidFill>
+                          <a:srgbClr val="1E2A38"/>
+                        </a:solidFill>
+                        <a:latin typeface="Calibri" pitchFamily="34" charset="0"/>
+                        <a:cs typeface="Calibri" pitchFamily="34" charset="-120"/>
+                      </a:endParaRPr>
                     </a:p>
                   </a:txBody>
                   <a:tcPr marL="45720" marR="45720" marT="27000" marB="27000" anchor="ctr">
@@ -42293,6 +42326,55 @@
       </p:grpSpPr>
       <p:sp>
         <p:nvSpPr>
+          <p:cNvPr id="5" name="Rounded Rectangle 4"/>
+          <p:cNvSpPr/>
+          <p:nvPr/>
+        </p:nvSpPr>
+        <p:spPr>
+          <a:xfrm>
+            <a:off x="1609512" y="2679191"/>
+            <a:ext cx="8942495" cy="3621024"/>
+          </a:xfrm>
+          <a:prstGeom prst="roundRect">
+            <a:avLst>
+              <a:gd name="adj" fmla="val 3000"/>
+            </a:avLst>
+          </a:prstGeom>
+          <a:solidFill>
+            <a:srgbClr val="F3F5F7"/>
+          </a:solidFill>
+          <a:ln w="12700">
+            <a:solidFill>
+              <a:srgbClr val="E3E7EB"/>
+            </a:solidFill>
+          </a:ln>
+          <a:effectLst/>
+        </p:spPr>
+        <p:style>
+          <a:lnRef idx="1">
+            <a:schemeClr val="accent1"/>
+          </a:lnRef>
+          <a:fillRef idx="3">
+            <a:schemeClr val="accent1"/>
+          </a:fillRef>
+          <a:effectRef idx="2">
+            <a:schemeClr val="accent1"/>
+          </a:effectRef>
+          <a:fontRef idx="minor">
+            <a:schemeClr val="lt1"/>
+          </a:fontRef>
+        </p:style>
+        <p:txBody>
+          <a:bodyPr rtlCol="0" anchor="ctr"/>
+          <a:lstStyle/>
+          <a:p>
+            <a:pPr algn="ctr"/>
+            <a:endParaRPr/>
+          </a:p>
+        </p:txBody>
+      </p:sp>
+      <p:sp>
+        <p:nvSpPr>
           <p:cNvPr id="2" name="Text 0"/>
           <p:cNvSpPr/>
           <p:nvPr/>
@@ -42378,7 +42460,7 @@
         <p:spPr>
           <a:xfrm>
             <a:off x="731520" y="1554480"/>
-            <a:ext cx="10607040" cy="1371600"/>
+            <a:ext cx="10607040" cy="1143000"/>
           </a:xfrm>
           <a:prstGeom prst="rect">
             <a:avLst/>
@@ -42409,7 +42491,7 @@
                 <a:ea typeface="Calibri" pitchFamily="34" charset="-122"/>
                 <a:cs typeface="Calibri" pitchFamily="34" charset="-120"/>
               </a:rPr>
-              <a:t>Využívají vlastností polovodičů (typicky křemík)</a:t>
+              <a:t>Čistý křemík téměř nevede – vodivost se získá dotováním, tedy nepatrnou příměsí cizího prvku</a:t>
             </a:r>
             <a:endParaRPr lang="en-US" sz="1550" dirty="0"/>
           </a:p>
@@ -42433,7 +42515,7 @@
                 <a:ea typeface="Calibri" pitchFamily="34" charset="-122"/>
                 <a:cs typeface="Calibri" pitchFamily="34" charset="-120"/>
               </a:rPr>
-              <a:t>Typ P – dotovaný trojmocným prvkem (např. bor), vodivost děrami (chybějícími elektrony)</a:t>
+              <a:t>Typ P – trojmocná příměs (bor): chybí vazebný elektron, vzniká díra; nosičem náboje je díra (+)</a:t>
             </a:r>
             <a:endParaRPr lang="en-US" sz="1550" dirty="0"/>
           </a:p>
@@ -42457,49 +42539,15 @@
                 <a:ea typeface="Calibri" pitchFamily="34" charset="-122"/>
                 <a:cs typeface="Calibri" pitchFamily="34" charset="-120"/>
               </a:rPr>
-              <a:t>Typ N – dotovaný pětimocným prvkem (např. fosfor), vodivost elektrony (jejich přebytkem)</a:t>
+              <a:t>Typ N – pětimocná příměs (fosfor): jeden elektron přebývá a zůstává volný; nosičem je elektron (−)</a:t>
             </a:r>
             <a:endParaRPr lang="en-US" sz="1550" dirty="0"/>
           </a:p>
         </p:txBody>
       </p:sp>
-      <p:sp>
-        <p:nvSpPr>
-          <p:cNvPr id="5" name="Shape 3"/>
-          <p:cNvSpPr/>
-          <p:nvPr/>
-        </p:nvSpPr>
-        <p:spPr>
-          <a:xfrm>
-            <a:off x="1724720" y="2953512"/>
-            <a:ext cx="3225680" cy="3429000"/>
-          </a:xfrm>
-          <a:prstGeom prst="roundRect">
-            <a:avLst>
-              <a:gd name="adj" fmla="val 1701"/>
-            </a:avLst>
-          </a:prstGeom>
-          <a:solidFill>
-            <a:srgbClr val="F3F5F7"/>
-          </a:solidFill>
-          <a:ln w="12700">
-            <a:solidFill>
-              <a:srgbClr val="E3E7EB"/>
-            </a:solidFill>
-            <a:prstDash val="solid"/>
-          </a:ln>
-        </p:spPr>
-        <p:txBody>
-          <a:bodyPr/>
-          <a:lstStyle/>
-          <a:p>
-            <a:endParaRPr lang="cs-CZ"/>
-          </a:p>
-        </p:txBody>
-      </p:sp>
       <p:pic>
         <p:nvPicPr>
-          <p:cNvPr id="6" name="Image 0" descr="assets/pn_typ_p.png"/>
+          <p:cNvPr id="6" name="Picture 5" descr="pn_mrizka.png"/>
           <p:cNvPicPr>
             <a:picLocks noChangeAspect="1"/>
           </p:cNvPicPr>
@@ -42507,154 +42555,20 @@
         </p:nvPicPr>
         <p:blipFill>
           <a:blip r:embed="rId3"/>
-          <a:srcRect/>
-          <a:stretch/>
+          <a:stretch>
+            <a:fillRect/>
+          </a:stretch>
         </p:blipFill>
         <p:spPr>
           <a:xfrm>
-            <a:off x="1834448" y="3063240"/>
-            <a:ext cx="3006224" cy="2880360"/>
+            <a:off x="1719240" y="2788920"/>
+            <a:ext cx="8723039" cy="3401568"/>
           </a:xfrm>
           <a:prstGeom prst="rect">
             <a:avLst/>
           </a:prstGeom>
         </p:spPr>
       </p:pic>
-      <p:sp>
-        <p:nvSpPr>
-          <p:cNvPr id="7" name="Text 4"/>
-          <p:cNvSpPr/>
-          <p:nvPr/>
-        </p:nvSpPr>
-        <p:spPr>
-          <a:xfrm>
-            <a:off x="1724720" y="5961888"/>
-            <a:ext cx="3225680" cy="292608"/>
-          </a:xfrm>
-          <a:prstGeom prst="rect">
-            <a:avLst/>
-          </a:prstGeom>
-          <a:noFill/>
-          <a:ln/>
-        </p:spPr>
-        <p:txBody>
-          <a:bodyPr wrap="square" rtlCol="0" anchor="ctr"/>
-          <a:lstStyle/>
-          <a:p>
-            <a:pPr marL="0" indent="0" algn="ctr">
-              <a:buNone/>
-            </a:pPr>
-            <a:r>
-              <a:rPr lang="en-US" sz="1100" i="1" dirty="0">
-                <a:solidFill>
-                  <a:srgbClr val="5B6B78"/>
-                </a:solidFill>
-                <a:latin typeface="Calibri" pitchFamily="34" charset="0"/>
-                <a:ea typeface="Calibri" pitchFamily="34" charset="-122"/>
-                <a:cs typeface="Calibri" pitchFamily="34" charset="-120"/>
-              </a:rPr>
-              <a:t>Polovodič typu P</a:t>
-            </a:r>
-            <a:endParaRPr lang="en-US" sz="1100" dirty="0"/>
-          </a:p>
-        </p:txBody>
-      </p:sp>
-      <p:sp>
-        <p:nvSpPr>
-          <p:cNvPr id="8" name="Shape 5"/>
-          <p:cNvSpPr/>
-          <p:nvPr/>
-        </p:nvSpPr>
-        <p:spPr>
-          <a:xfrm>
-            <a:off x="7486463" y="2953512"/>
-            <a:ext cx="3040755" cy="3429000"/>
-          </a:xfrm>
-          <a:prstGeom prst="roundRect">
-            <a:avLst>
-              <a:gd name="adj" fmla="val 1804"/>
-            </a:avLst>
-          </a:prstGeom>
-          <a:solidFill>
-            <a:srgbClr val="F3F5F7"/>
-          </a:solidFill>
-          <a:ln w="12700">
-            <a:solidFill>
-              <a:srgbClr val="E3E7EB"/>
-            </a:solidFill>
-            <a:prstDash val="solid"/>
-          </a:ln>
-        </p:spPr>
-        <p:txBody>
-          <a:bodyPr/>
-          <a:lstStyle/>
-          <a:p>
-            <a:endParaRPr lang="cs-CZ"/>
-          </a:p>
-        </p:txBody>
-      </p:sp>
-      <p:pic>
-        <p:nvPicPr>
-          <p:cNvPr id="9" name="Image 1" descr="assets/pn_typ_n.png"/>
-          <p:cNvPicPr>
-            <a:picLocks noChangeAspect="1"/>
-          </p:cNvPicPr>
-          <p:nvPr/>
-        </p:nvPicPr>
-        <p:blipFill>
-          <a:blip r:embed="rId4"/>
-          <a:srcRect/>
-          <a:stretch/>
-        </p:blipFill>
-        <p:spPr>
-          <a:xfrm>
-            <a:off x="7596191" y="3063240"/>
-            <a:ext cx="2821299" cy="2880360"/>
-          </a:xfrm>
-          <a:prstGeom prst="rect">
-            <a:avLst/>
-          </a:prstGeom>
-        </p:spPr>
-      </p:pic>
-      <p:sp>
-        <p:nvSpPr>
-          <p:cNvPr id="10" name="Text 6"/>
-          <p:cNvSpPr/>
-          <p:nvPr/>
-        </p:nvSpPr>
-        <p:spPr>
-          <a:xfrm>
-            <a:off x="7486463" y="5961888"/>
-            <a:ext cx="3040755" cy="292608"/>
-          </a:xfrm>
-          <a:prstGeom prst="rect">
-            <a:avLst/>
-          </a:prstGeom>
-          <a:noFill/>
-          <a:ln/>
-        </p:spPr>
-        <p:txBody>
-          <a:bodyPr wrap="square" rtlCol="0" anchor="ctr"/>
-          <a:lstStyle/>
-          <a:p>
-            <a:pPr marL="0" indent="0" algn="ctr">
-              <a:buNone/>
-            </a:pPr>
-            <a:r>
-              <a:rPr lang="en-US" sz="1100" i="1" dirty="0">
-                <a:solidFill>
-                  <a:srgbClr val="5B6B78"/>
-                </a:solidFill>
-                <a:latin typeface="Calibri" pitchFamily="34" charset="0"/>
-                <a:ea typeface="Calibri" pitchFamily="34" charset="-122"/>
-                <a:cs typeface="Calibri" pitchFamily="34" charset="-120"/>
-              </a:rPr>
-              <a:t>Polovodič typu N</a:t>
-            </a:r>
-            <a:endParaRPr lang="en-US" sz="1100" dirty="0"/>
-          </a:p>
-        </p:txBody>
-      </p:sp>
     </p:spTree>
   </p:cSld>
   <p:clrMapOvr>
@@ -42690,6 +42604,55 @@
       </p:grpSpPr>
       <p:sp>
         <p:nvSpPr>
+          <p:cNvPr id="5" name="Rounded Rectangle 4"/>
+          <p:cNvSpPr/>
+          <p:nvPr/>
+        </p:nvSpPr>
+        <p:spPr>
+          <a:xfrm>
+            <a:off x="1096576" y="3136391"/>
+            <a:ext cx="9968366" cy="3099815"/>
+          </a:xfrm>
+          <a:prstGeom prst="roundRect">
+            <a:avLst>
+              <a:gd name="adj" fmla="val 3000"/>
+            </a:avLst>
+          </a:prstGeom>
+          <a:solidFill>
+            <a:srgbClr val="F3F5F7"/>
+          </a:solidFill>
+          <a:ln w="12700">
+            <a:solidFill>
+              <a:srgbClr val="E3E7EB"/>
+            </a:solidFill>
+          </a:ln>
+          <a:effectLst/>
+        </p:spPr>
+        <p:style>
+          <a:lnRef idx="1">
+            <a:schemeClr val="accent1"/>
+          </a:lnRef>
+          <a:fillRef idx="3">
+            <a:schemeClr val="accent1"/>
+          </a:fillRef>
+          <a:effectRef idx="2">
+            <a:schemeClr val="accent1"/>
+          </a:effectRef>
+          <a:fontRef idx="minor">
+            <a:schemeClr val="lt1"/>
+          </a:fontRef>
+        </p:style>
+        <p:txBody>
+          <a:bodyPr rtlCol="0" anchor="ctr"/>
+          <a:lstStyle/>
+          <a:p>
+            <a:pPr algn="ctr"/>
+            <a:endParaRPr/>
+          </a:p>
+        </p:txBody>
+      </p:sp>
+      <p:sp>
+        <p:nvSpPr>
           <p:cNvPr id="2" name="Text 0"/>
           <p:cNvSpPr/>
           <p:nvPr/>
@@ -42721,7 +42684,7 @@
                 <a:ea typeface="Cambria" pitchFamily="34" charset="-122"/>
                 <a:cs typeface="Cambria" pitchFamily="34" charset="-120"/>
               </a:rPr>
-              <a:t>Přechod PN</a:t>
+              <a:t>Přechod PN – jak vzniká</a:t>
             </a:r>
             <a:endParaRPr lang="en-US" sz="3000" dirty="0"/>
           </a:p>
@@ -42806,7 +42769,7 @@
                 <a:ea typeface="Calibri" pitchFamily="34" charset="-122"/>
                 <a:cs typeface="Calibri" pitchFamily="34" charset="-120"/>
               </a:rPr>
-              <a:t>Na rozhraní P a N vzniká přechod PN s tzv. ochuzenou vrstvou bez volných nosičů náboje</a:t>
+              <a:t>Na rozhraní P a N se díry a elektrony vzájemně setkají a zaniknou (rekombinují)</a:t>
             </a:r>
             <a:endParaRPr lang="en-US" sz="1550" dirty="0"/>
           </a:p>
@@ -42830,7 +42793,7 @@
                 <a:ea typeface="Calibri" pitchFamily="34" charset="-122"/>
                 <a:cs typeface="Calibri" pitchFamily="34" charset="-120"/>
               </a:rPr>
-              <a:t>Vzniklé elektrické pole brání dalšímu pohybu nábojů přes přechod</a:t>
+              <a:t>Zbydou nepohyblivé ionty příměsí – vzniká ochuzená vrstva bez volných nosičů</a:t>
             </a:r>
             <a:endParaRPr lang="en-US" sz="1550" dirty="0"/>
           </a:p>
@@ -42854,7 +42817,7 @@
                 <a:ea typeface="Calibri" pitchFamily="34" charset="-122"/>
                 <a:cs typeface="Calibri" pitchFamily="34" charset="-120"/>
               </a:rPr>
-              <a:t>V propustném směru přechod otevřeme a proud jím prochází</a:t>
+              <a:t>Náboj těchto iontů vytvoří vlastní elektrické pole Ei, které dalšímu průniku brání</a:t>
             </a:r>
             <a:endParaRPr lang="en-US" sz="1550" dirty="0"/>
           </a:p>
@@ -42878,49 +42841,15 @@
                 <a:ea typeface="Calibri" pitchFamily="34" charset="-122"/>
                 <a:cs typeface="Calibri" pitchFamily="34" charset="-120"/>
               </a:rPr>
-              <a:t>V závěrném směru přechod blokuje průchod proudu</a:t>
+              <a:t>Tím se ustálí rovnováha; překonat bariéru vyžaduje napětí ≈ 0,7 V (křemík)</a:t>
             </a:r>
             <a:endParaRPr lang="en-US" sz="1550" dirty="0"/>
           </a:p>
         </p:txBody>
       </p:sp>
-      <p:sp>
-        <p:nvSpPr>
-          <p:cNvPr id="5" name="Shape 3"/>
-          <p:cNvSpPr/>
-          <p:nvPr/>
-        </p:nvSpPr>
-        <p:spPr>
-          <a:xfrm>
-            <a:off x="4337676" y="3392424"/>
-            <a:ext cx="3486167" cy="3072384"/>
-          </a:xfrm>
-          <a:prstGeom prst="roundRect">
-            <a:avLst>
-              <a:gd name="adj" fmla="val 1786"/>
-            </a:avLst>
-          </a:prstGeom>
-          <a:solidFill>
-            <a:srgbClr val="F3F5F7"/>
-          </a:solidFill>
-          <a:ln w="12700">
-            <a:solidFill>
-              <a:srgbClr val="E3E7EB"/>
-            </a:solidFill>
-            <a:prstDash val="solid"/>
-          </a:ln>
-        </p:spPr>
-        <p:txBody>
-          <a:bodyPr/>
-          <a:lstStyle/>
-          <a:p>
-            <a:endParaRPr lang="cs-CZ"/>
-          </a:p>
-        </p:txBody>
-      </p:sp>
       <p:pic>
         <p:nvPicPr>
-          <p:cNvPr id="6" name="Image 0" descr="assets/pn_prechod_c.png"/>
+          <p:cNvPr id="6" name="Picture 5" descr="pn_vznik.png"/>
           <p:cNvPicPr>
             <a:picLocks noChangeAspect="1"/>
           </p:cNvPicPr>
@@ -42928,13 +42857,14 @@
         </p:nvPicPr>
         <p:blipFill>
           <a:blip r:embed="rId3"/>
-          <a:srcRect/>
-          <a:stretch/>
+          <a:stretch>
+            <a:fillRect/>
+          </a:stretch>
         </p:blipFill>
         <p:spPr>
           <a:xfrm>
-            <a:off x="4447404" y="3502152"/>
-            <a:ext cx="3266711" cy="2852928"/>
+            <a:off x="1206304" y="3246120"/>
+            <a:ext cx="9748910" cy="2880360"/>
           </a:xfrm>
           <a:prstGeom prst="rect">
             <a:avLst/>
@@ -42950,6 +42880,319 @@
 </file>
 
 <file path=ppt/slides/slide45.xml><?xml version="1.0" encoding="utf-8"?>
+<p:sld xmlns:a="http://schemas.openxmlformats.org/drawingml/2006/main" xmlns:r="http://schemas.openxmlformats.org/officeDocument/2006/relationships" xmlns:p="http://schemas.openxmlformats.org/presentationml/2006/main">
+  <p:cSld name="Slide 41">
+    <p:bg>
+      <p:bgPr>
+        <a:solidFill>
+          <a:srgbClr val="FFFFFF"/>
+        </a:solidFill>
+        <a:effectLst/>
+      </p:bgPr>
+    </p:bg>
+    <p:spTree>
+      <p:nvGrpSpPr>
+        <p:cNvPr id="1" name=""/>
+        <p:cNvGrpSpPr/>
+        <p:nvPr/>
+      </p:nvGrpSpPr>
+      <p:grpSpPr>
+        <a:xfrm>
+          <a:off x="0" y="0"/>
+          <a:ext cx="0" cy="0"/>
+          <a:chOff x="0" y="0"/>
+          <a:chExt cx="0" cy="0"/>
+        </a:xfrm>
+      </p:grpSpPr>
+      <p:sp>
+        <p:nvSpPr>
+          <p:cNvPr id="5" name="Rounded Rectangle 4"/>
+          <p:cNvSpPr/>
+          <p:nvPr/>
+        </p:nvSpPr>
+        <p:spPr>
+          <a:xfrm>
+            <a:off x="1792927" y="3044952"/>
+            <a:ext cx="8575665" cy="3099815"/>
+          </a:xfrm>
+          <a:prstGeom prst="roundRect">
+            <a:avLst>
+              <a:gd name="adj" fmla="val 3000"/>
+            </a:avLst>
+          </a:prstGeom>
+          <a:solidFill>
+            <a:srgbClr val="F3F5F7"/>
+          </a:solidFill>
+          <a:ln w="12700">
+            <a:solidFill>
+              <a:srgbClr val="E3E7EB"/>
+            </a:solidFill>
+          </a:ln>
+          <a:effectLst/>
+        </p:spPr>
+        <p:style>
+          <a:lnRef idx="1">
+            <a:schemeClr val="accent1"/>
+          </a:lnRef>
+          <a:fillRef idx="3">
+            <a:schemeClr val="accent1"/>
+          </a:fillRef>
+          <a:effectRef idx="2">
+            <a:schemeClr val="accent1"/>
+          </a:effectRef>
+          <a:fontRef idx="minor">
+            <a:schemeClr val="lt1"/>
+          </a:fontRef>
+        </p:style>
+        <p:txBody>
+          <a:bodyPr rtlCol="0" anchor="ctr"/>
+          <a:lstStyle/>
+          <a:p>
+            <a:pPr algn="ctr"/>
+            <a:endParaRPr/>
+          </a:p>
+        </p:txBody>
+      </p:sp>
+      <p:sp>
+        <p:nvSpPr>
+          <p:cNvPr id="2" name="Text 0"/>
+          <p:cNvSpPr/>
+          <p:nvPr/>
+        </p:nvSpPr>
+        <p:spPr>
+          <a:xfrm>
+            <a:off x="640080" y="411480"/>
+            <a:ext cx="10881360" cy="777240"/>
+          </a:xfrm>
+          <a:prstGeom prst="rect">
+            <a:avLst/>
+          </a:prstGeom>
+          <a:noFill/>
+          <a:ln/>
+        </p:spPr>
+        <p:txBody>
+          <a:bodyPr wrap="square" rtlCol="0" anchor="ctr"/>
+          <a:lstStyle/>
+          <a:p>
+            <a:pPr marL="0" indent="0">
+              <a:buNone/>
+            </a:pPr>
+            <a:r>
+              <a:rPr lang="en-US" sz="3000" b="1" dirty="0">
+                <a:solidFill>
+                  <a:srgbClr val="1E2A38"/>
+                </a:solidFill>
+                <a:latin typeface="Cambria" pitchFamily="34" charset="0"/>
+                <a:ea typeface="Cambria" pitchFamily="34" charset="-122"/>
+                <a:cs typeface="Cambria" pitchFamily="34" charset="-120"/>
+              </a:rPr>
+              <a:t>Přechod PN v propustném a závěrném směru</a:t>
+            </a:r>
+            <a:endParaRPr lang="en-US" sz="3000" dirty="0"/>
+          </a:p>
+        </p:txBody>
+      </p:sp>
+      <p:sp>
+        <p:nvSpPr>
+          <p:cNvPr id="3" name="Text 1"/>
+          <p:cNvSpPr/>
+          <p:nvPr/>
+        </p:nvSpPr>
+        <p:spPr>
+          <a:xfrm>
+            <a:off x="457200" y="6473952"/>
+            <a:ext cx="5486400" cy="274320"/>
+          </a:xfrm>
+          <a:prstGeom prst="rect">
+            <a:avLst/>
+          </a:prstGeom>
+          <a:noFill/>
+          <a:ln/>
+        </p:spPr>
+        <p:txBody>
+          <a:bodyPr wrap="square" rtlCol="0" anchor="ctr"/>
+          <a:lstStyle/>
+          <a:p>
+            <a:pPr marL="0" indent="0" algn="l">
+              <a:buNone/>
+            </a:pPr>
+            <a:r>
+              <a:rPr lang="en-US" sz="900" dirty="0">
+                <a:solidFill>
+                  <a:srgbClr val="5B6B78"/>
+                </a:solidFill>
+                <a:latin typeface="Calibri" pitchFamily="34" charset="0"/>
+                <a:ea typeface="Calibri" pitchFamily="34" charset="-122"/>
+                <a:cs typeface="Calibri" pitchFamily="34" charset="-120"/>
+              </a:rPr>
+              <a:t>Elektronické součástky  ·  Přednáška 2</a:t>
+            </a:r>
+            <a:endParaRPr lang="en-US" sz="900" dirty="0"/>
+          </a:p>
+        </p:txBody>
+      </p:sp>
+      <p:sp>
+        <p:nvSpPr>
+          <p:cNvPr id="4" name="Text 2"/>
+          <p:cNvSpPr/>
+          <p:nvPr/>
+        </p:nvSpPr>
+        <p:spPr>
+          <a:xfrm>
+            <a:off x="731520" y="1463040"/>
+            <a:ext cx="10607040" cy="1554480"/>
+          </a:xfrm>
+          <a:prstGeom prst="rect">
+            <a:avLst/>
+          </a:prstGeom>
+          <a:noFill/>
+          <a:ln/>
+        </p:spPr>
+        <p:txBody>
+          <a:bodyPr wrap="square" rtlCol="0" anchor="t"/>
+          <a:lstStyle/>
+          <a:p>
+            <a:pPr marL="342900" indent="-342900">
+              <a:lnSpc>
+                <a:spcPct val="112000"/>
+              </a:lnSpc>
+              <a:spcAft>
+                <a:spcPts val="800"/>
+              </a:spcAft>
+              <a:buSzPct val="100000"/>
+              <a:buChar char="●"/>
+            </a:pPr>
+            <a:r>
+              <a:rPr lang="en-US" sz="1550" dirty="0">
+                <a:solidFill>
+                  <a:srgbClr val="1E2A38"/>
+                </a:solidFill>
+                <a:latin typeface="Calibri" pitchFamily="34" charset="0"/>
+                <a:ea typeface="Calibri" pitchFamily="34" charset="-122"/>
+                <a:cs typeface="Calibri" pitchFamily="34" charset="-120"/>
+              </a:rPr>
+              <a:t>Propustný směr: „+“ zdroje na P – vnější pole ruší vlastní pole Ei, vrstva se zúží a proud prochází</a:t>
+            </a:r>
+            <a:endParaRPr lang="en-US" sz="1550" dirty="0"/>
+          </a:p>
+          <a:p>
+            <a:pPr marL="342900" indent="-342900">
+              <a:lnSpc>
+                <a:spcPct val="112000"/>
+              </a:lnSpc>
+              <a:spcAft>
+                <a:spcPts val="800"/>
+              </a:spcAft>
+              <a:buSzPct val="100000"/>
+              <a:buChar char="●"/>
+            </a:pPr>
+            <a:r>
+              <a:rPr lang="en-US" sz="1550" dirty="0">
+                <a:solidFill>
+                  <a:srgbClr val="1E2A38"/>
+                </a:solidFill>
+                <a:latin typeface="Calibri" pitchFamily="34" charset="0"/>
+                <a:ea typeface="Calibri" pitchFamily="34" charset="-122"/>
+                <a:cs typeface="Calibri" pitchFamily="34" charset="-120"/>
+              </a:rPr>
+              <a:t>Závěrný směr: „+“ zdroje na N – vrstva se rozšíří, přechod se uzavře a prochází jen nepatrný zbytkový proud</a:t>
+            </a:r>
+            <a:endParaRPr lang="en-US" sz="1550" dirty="0"/>
+          </a:p>
+          <a:p>
+            <a:pPr marL="342900" indent="-342900">
+              <a:lnSpc>
+                <a:spcPct val="112000"/>
+              </a:lnSpc>
+              <a:spcAft>
+                <a:spcPts val="800"/>
+              </a:spcAft>
+              <a:buSzPct val="100000"/>
+              <a:buChar char="●"/>
+            </a:pPr>
+            <a:r>
+              <a:rPr lang="en-US" sz="1550" dirty="0">
+                <a:solidFill>
+                  <a:srgbClr val="1E2A38"/>
+                </a:solidFill>
+                <a:latin typeface="Calibri" pitchFamily="34" charset="0"/>
+                <a:ea typeface="Calibri" pitchFamily="34" charset="-122"/>
+                <a:cs typeface="Calibri" pitchFamily="34" charset="-120"/>
+              </a:rPr>
+              <a:t>Právě tato nesouměrnost dělá z přechodu PN jednosměrný ventil – základ diody</a:t>
+            </a:r>
+            <a:endParaRPr lang="en-US" sz="1550" dirty="0"/>
+          </a:p>
+        </p:txBody>
+      </p:sp>
+      <p:pic>
+        <p:nvPicPr>
+          <p:cNvPr id="6" name="Picture 5" descr="pn_smery.gif"/>
+          <p:cNvPicPr>
+            <a:picLocks noChangeAspect="1"/>
+          </p:cNvPicPr>
+          <p:nvPr/>
+        </p:nvPicPr>
+        <p:blipFill>
+          <a:blip r:embed="rId3"/>
+          <a:stretch>
+            <a:fillRect/>
+          </a:stretch>
+        </p:blipFill>
+        <p:spPr>
+          <a:xfrm>
+            <a:off x="1902655" y="3154680"/>
+            <a:ext cx="8356209" cy="2880360"/>
+          </a:xfrm>
+          <a:prstGeom prst="rect">
+            <a:avLst/>
+          </a:prstGeom>
+        </p:spPr>
+      </p:pic>
+      <p:sp>
+        <p:nvSpPr>
+          <p:cNvPr id="7" name="TextBox 6"/>
+          <p:cNvSpPr txBox="1"/>
+          <p:nvPr/>
+        </p:nvSpPr>
+        <p:spPr>
+          <a:xfrm>
+            <a:off x="1902655" y="6163055"/>
+            <a:ext cx="8356209" cy="310896"/>
+          </a:xfrm>
+          <a:prstGeom prst="rect">
+            <a:avLst/>
+          </a:prstGeom>
+          <a:noFill/>
+        </p:spPr>
+        <p:txBody>
+          <a:bodyPr wrap="square" lIns="0" rIns="0">
+            <a:spAutoFit/>
+          </a:bodyPr>
+          <a:lstStyle/>
+          <a:p>
+            <a:pPr algn="ctr"/>
+            <a:r>
+              <a:rPr sz="1100" i="1">
+                <a:solidFill>
+                  <a:srgbClr val="5B6B78"/>
+                </a:solidFill>
+                <a:latin typeface="Calibri"/>
+              </a:rPr>
+              <a:t>animace – v režimu prezentace je vidět pohyb nosičů náboje</a:t>
+            </a:r>
+          </a:p>
+        </p:txBody>
+      </p:sp>
+    </p:spTree>
+  </p:cSld>
+  <p:clrMapOvr>
+    <a:masterClrMapping/>
+  </p:clrMapOvr>
+</p:sld>
+</file>
+
+<file path=ppt/slides/slide46.xml><?xml version="1.0" encoding="utf-8"?>
 <p:sld xmlns:a="http://schemas.openxmlformats.org/drawingml/2006/main" xmlns:r="http://schemas.openxmlformats.org/officeDocument/2006/relationships" xmlns:p="http://schemas.openxmlformats.org/presentationml/2006/main">
   <p:cSld name="Slide 42">
     <p:bg>
@@ -44801,7 +45044,7 @@
 </p:sld>
 </file>
 
-<file path=ppt/slides/slide46.xml><?xml version="1.0" encoding="utf-8"?>
+<file path=ppt/slides/slide47.xml><?xml version="1.0" encoding="utf-8"?>
 <p:sld xmlns:a="http://schemas.openxmlformats.org/drawingml/2006/main" xmlns:r="http://schemas.openxmlformats.org/officeDocument/2006/relationships" xmlns:p="http://schemas.openxmlformats.org/presentationml/2006/main">
   <p:cSld name="Slide 43">
     <p:bg>
@@ -45087,7 +45330,7 @@
 </p:sld>
 </file>
 
-<file path=ppt/slides/slide47.xml><?xml version="1.0" encoding="utf-8"?>
+<file path=ppt/slides/slide48.xml><?xml version="1.0" encoding="utf-8"?>
 <p:sld xmlns:a="http://schemas.openxmlformats.org/drawingml/2006/main" xmlns:r="http://schemas.openxmlformats.org/officeDocument/2006/relationships" xmlns:p="http://schemas.openxmlformats.org/presentationml/2006/main">
   <p:cSld name="Slide 44">
     <p:bg>
@@ -45325,7 +45568,7 @@
 </p:sld>
 </file>
 
-<file path=ppt/slides/slide48.xml><?xml version="1.0" encoding="utf-8"?>
+<file path=ppt/slides/slide49.xml><?xml version="1.0" encoding="utf-8"?>
 <p:sld xmlns:a="http://schemas.openxmlformats.org/drawingml/2006/main" xmlns:r="http://schemas.openxmlformats.org/officeDocument/2006/relationships" xmlns:p="http://schemas.openxmlformats.org/presentationml/2006/main">
   <p:cSld name="Slide 45">
     <p:bg>
@@ -45713,319 +45956,6 @@
               <a:t>Výstupní napětí</a:t>
             </a:r>
             <a:endParaRPr lang="en-US" sz="1100" dirty="0"/>
-          </a:p>
-        </p:txBody>
-      </p:sp>
-    </p:spTree>
-  </p:cSld>
-  <p:clrMapOvr>
-    <a:masterClrMapping/>
-  </p:clrMapOvr>
-</p:sld>
-</file>
-
-<file path=ppt/slides/slide49.xml><?xml version="1.0" encoding="utf-8"?>
-<p:sld xmlns:a="http://schemas.openxmlformats.org/drawingml/2006/main" xmlns:r="http://schemas.openxmlformats.org/officeDocument/2006/relationships" xmlns:p="http://schemas.openxmlformats.org/presentationml/2006/main">
-  <p:cSld name="Slide 43">
-    <p:bg>
-      <p:bgPr>
-        <a:solidFill>
-          <a:srgbClr val="FFFFFF"/>
-        </a:solidFill>
-        <a:effectLst/>
-      </p:bgPr>
-    </p:bg>
-    <p:spTree>
-      <p:nvGrpSpPr>
-        <p:cNvPr id="1" name=""/>
-        <p:cNvGrpSpPr/>
-        <p:nvPr/>
-      </p:nvGrpSpPr>
-      <p:grpSpPr>
-        <a:xfrm>
-          <a:off x="0" y="0"/>
-          <a:ext cx="0" cy="0"/>
-          <a:chOff x="0" y="0"/>
-          <a:chExt cx="0" cy="0"/>
-        </a:xfrm>
-      </p:grpSpPr>
-      <p:sp>
-        <p:nvSpPr>
-          <p:cNvPr id="2" name="Text 0"/>
-          <p:cNvSpPr/>
-          <p:nvPr/>
-        </p:nvSpPr>
-        <p:spPr>
-          <a:xfrm>
-            <a:off x="640080" y="411480"/>
-            <a:ext cx="10881360" cy="777240"/>
-          </a:xfrm>
-          <a:prstGeom prst="rect">
-            <a:avLst/>
-          </a:prstGeom>
-          <a:noFill/>
-          <a:ln/>
-        </p:spPr>
-        <p:txBody>
-          <a:bodyPr wrap="square" rtlCol="0" anchor="ctr"/>
-          <a:lstStyle/>
-          <a:p>
-            <a:pPr marL="0" indent="0">
-              <a:buNone/>
-            </a:pPr>
-            <a:r>
-              <a:rPr lang="en-US" sz="3000" b="1" dirty="0">
-                <a:solidFill>
-                  <a:srgbClr val="1E2A38"/>
-                </a:solidFill>
-                <a:latin typeface="Cambria" pitchFamily="34" charset="0"/>
-                <a:ea typeface="Cambria" pitchFamily="34" charset="-122"/>
-                <a:cs typeface="Cambria" pitchFamily="34" charset="-120"/>
-              </a:rPr>
-              <a:t>Můstkový usměrňovač krok za krokem</a:t>
-            </a:r>
-            <a:endParaRPr lang="en-US" sz="3000" dirty="0"/>
-          </a:p>
-        </p:txBody>
-      </p:sp>
-      <p:sp>
-        <p:nvSpPr>
-          <p:cNvPr id="3" name="Text 1"/>
-          <p:cNvSpPr/>
-          <p:nvPr/>
-        </p:nvSpPr>
-        <p:spPr>
-          <a:xfrm>
-            <a:off x="457200" y="6473952"/>
-            <a:ext cx="5486400" cy="274320"/>
-          </a:xfrm>
-          <a:prstGeom prst="rect">
-            <a:avLst/>
-          </a:prstGeom>
-          <a:noFill/>
-          <a:ln/>
-        </p:spPr>
-        <p:txBody>
-          <a:bodyPr wrap="square" rtlCol="0" anchor="ctr"/>
-          <a:lstStyle/>
-          <a:p>
-            <a:pPr marL="0" indent="0" algn="l">
-              <a:buNone/>
-            </a:pPr>
-            <a:r>
-              <a:rPr lang="en-US" sz="900" dirty="0">
-                <a:solidFill>
-                  <a:srgbClr val="5B6B78"/>
-                </a:solidFill>
-                <a:latin typeface="Calibri" pitchFamily="34" charset="0"/>
-                <a:ea typeface="Calibri" pitchFamily="34" charset="-122"/>
-                <a:cs typeface="Calibri" pitchFamily="34" charset="-120"/>
-              </a:rPr>
-              <a:t>Elektronické součástky  ·  Přednáška 2</a:t>
-            </a:r>
-            <a:endParaRPr lang="en-US" sz="900" dirty="0"/>
-          </a:p>
-        </p:txBody>
-      </p:sp>
-      <p:sp>
-        <p:nvSpPr>
-          <p:cNvPr id="4" name="Text 2"/>
-          <p:cNvSpPr/>
-          <p:nvPr/>
-        </p:nvSpPr>
-        <p:spPr>
-          <a:xfrm>
-            <a:off x="731520" y="1417320"/>
-            <a:ext cx="10607040" cy="1371600"/>
-          </a:xfrm>
-          <a:prstGeom prst="rect">
-            <a:avLst/>
-          </a:prstGeom>
-          <a:noFill/>
-          <a:ln/>
-        </p:spPr>
-        <p:txBody>
-          <a:bodyPr wrap="square" rtlCol="0" anchor="t"/>
-          <a:lstStyle/>
-          <a:p>
-            <a:pPr marL="342900" indent="-342900">
-              <a:lnSpc>
-                <a:spcPct val="112000"/>
-              </a:lnSpc>
-              <a:spcAft>
-                <a:spcPts val="1200"/>
-              </a:spcAft>
-              <a:buSzPct val="100000"/>
-              <a:buChar char="●"/>
-            </a:pPr>
-            <a:r>
-              <a:rPr lang="en-US" sz="1550" dirty="0">
-                <a:solidFill>
-                  <a:srgbClr val="1E2A38"/>
-                </a:solidFill>
-                <a:latin typeface="Calibri" pitchFamily="34" charset="0"/>
-                <a:ea typeface="Calibri" pitchFamily="34" charset="-122"/>
-                <a:cs typeface="Calibri" pitchFamily="34" charset="-120"/>
-              </a:rPr>
-              <a:t>V každé půlvlně vedou dvě protilehlé diody, zbylé dvě jsou zavřené</a:t>
-            </a:r>
-            <a:endParaRPr lang="en-US" sz="1550" dirty="0"/>
-          </a:p>
-          <a:p>
-            <a:pPr marL="342900" indent="-342900">
-              <a:lnSpc>
-                <a:spcPct val="112000"/>
-              </a:lnSpc>
-              <a:spcAft>
-                <a:spcPts val="1200"/>
-              </a:spcAft>
-              <a:buSzPct val="100000"/>
-              <a:buChar char="●"/>
-            </a:pPr>
-            <a:r>
-              <a:rPr lang="en-US" sz="1550" dirty="0">
-                <a:solidFill>
-                  <a:srgbClr val="1E2A38"/>
-                </a:solidFill>
-                <a:latin typeface="Calibri" pitchFamily="34" charset="0"/>
-                <a:ea typeface="Calibri" pitchFamily="34" charset="-122"/>
-                <a:cs typeface="Calibri" pitchFamily="34" charset="-120"/>
-              </a:rPr>
-              <a:t>Proud zátěží teče v obou půlvlnách stejným směrem – výstup má stálou polaritu</a:t>
-            </a:r>
-            <a:endParaRPr lang="en-US" sz="1550" dirty="0"/>
-          </a:p>
-          <a:p>
-            <a:pPr marL="342900" indent="-342900">
-              <a:lnSpc>
-                <a:spcPct val="112000"/>
-              </a:lnSpc>
-              <a:spcAft>
-                <a:spcPts val="1200"/>
-              </a:spcAft>
-              <a:buSzPct val="100000"/>
-              <a:buChar char="●"/>
-            </a:pPr>
-            <a:r>
-              <a:rPr lang="en-US" sz="1550" dirty="0">
-                <a:solidFill>
-                  <a:srgbClr val="1E2A38"/>
-                </a:solidFill>
-                <a:latin typeface="Calibri" pitchFamily="34" charset="0"/>
-                <a:ea typeface="Calibri" pitchFamily="34" charset="-122"/>
-                <a:cs typeface="Calibri" pitchFamily="34" charset="-120"/>
-              </a:rPr>
-              <a:t>Výstupní napětí je zvlněné (|u₁|); vyhladí ho kondenzátor paralelně k zátěži (nabíjí se ve špičce, vybíjí mezi nimi – viz RC obvod)</a:t>
-            </a:r>
-            <a:endParaRPr lang="en-US" sz="1550" dirty="0"/>
-          </a:p>
-        </p:txBody>
-      </p:sp>
-      <p:sp>
-        <p:nvSpPr>
-          <p:cNvPr id="5" name="Rounded Rectangle 4"/>
-          <p:cNvSpPr/>
-          <p:nvPr/>
-        </p:nvSpPr>
-        <p:spPr>
-          <a:xfrm>
-            <a:off x="2956777" y="2724912"/>
-            <a:ext cx="6247964" cy="3739896"/>
-          </a:xfrm>
-          <a:prstGeom prst="roundRect">
-            <a:avLst>
-              <a:gd name="adj" fmla="val 4000"/>
-            </a:avLst>
-          </a:prstGeom>
-          <a:solidFill>
-            <a:srgbClr val="F3F5F7"/>
-          </a:solidFill>
-          <a:ln w="12700">
-            <a:solidFill>
-              <a:srgbClr val="E3E7EB"/>
-            </a:solidFill>
-          </a:ln>
-          <a:effectLst/>
-        </p:spPr>
-        <p:style>
-          <a:lnRef idx="1">
-            <a:schemeClr val="accent1"/>
-          </a:lnRef>
-          <a:fillRef idx="3">
-            <a:schemeClr val="accent1"/>
-          </a:fillRef>
-          <a:effectRef idx="2">
-            <a:schemeClr val="accent1"/>
-          </a:effectRef>
-          <a:fontRef idx="minor">
-            <a:schemeClr val="lt1"/>
-          </a:fontRef>
-        </p:style>
-        <p:txBody>
-          <a:bodyPr rtlCol="0" anchor="ctr"/>
-          <a:lstStyle/>
-          <a:p>
-            <a:pPr algn="ctr"/>
-            <a:endParaRPr/>
-          </a:p>
-        </p:txBody>
-      </p:sp>
-      <p:pic>
-        <p:nvPicPr>
-          <p:cNvPr id="6" name="Picture 5" descr="mustkovy_usmernovac.gif"/>
-          <p:cNvPicPr>
-            <a:picLocks noChangeAspect="1"/>
-          </p:cNvPicPr>
-          <p:nvPr/>
-        </p:nvPicPr>
-        <p:blipFill>
-          <a:blip r:embed="rId3"/>
-          <a:stretch>
-            <a:fillRect/>
-          </a:stretch>
-        </p:blipFill>
-        <p:spPr>
-          <a:xfrm>
-            <a:off x="3066505" y="2834640"/>
-            <a:ext cx="6028508" cy="3246120"/>
-          </a:xfrm>
-          <a:prstGeom prst="rect">
-            <a:avLst/>
-          </a:prstGeom>
-        </p:spPr>
-      </p:pic>
-      <p:sp>
-        <p:nvSpPr>
-          <p:cNvPr id="7" name="TextBox 6"/>
-          <p:cNvSpPr txBox="1"/>
-          <p:nvPr/>
-        </p:nvSpPr>
-        <p:spPr>
-          <a:xfrm>
-            <a:off x="2956777" y="6099048"/>
-            <a:ext cx="6247964" cy="292608"/>
-          </a:xfrm>
-          <a:prstGeom prst="rect">
-            <a:avLst/>
-          </a:prstGeom>
-          <a:noFill/>
-        </p:spPr>
-        <p:txBody>
-          <a:bodyPr wrap="none" lIns="0" rIns="0">
-            <a:spAutoFit/>
-          </a:bodyPr>
-          <a:lstStyle/>
-          <a:p>
-            <a:pPr algn="ctr"/>
-            <a:r>
-              <a:rPr sz="1000" i="1">
-                <a:solidFill>
-                  <a:srgbClr val="5B6B78"/>
-                </a:solidFill>
-                <a:latin typeface="Calibri"/>
-              </a:rPr>
-              <a:t>animace – přehraje se v režimu prezentace (nejprve celkový pohled, pak jedna perioda krok za krokem)</a:t>
-            </a:r>
           </a:p>
         </p:txBody>
       </p:sp>
@@ -47902,6 +47832,319 @@
 
 <file path=ppt/slides/slide50.xml><?xml version="1.0" encoding="utf-8"?>
 <p:sld xmlns:a="http://schemas.openxmlformats.org/drawingml/2006/main" xmlns:r="http://schemas.openxmlformats.org/officeDocument/2006/relationships" xmlns:p="http://schemas.openxmlformats.org/presentationml/2006/main">
+  <p:cSld name="Slide 43">
+    <p:bg>
+      <p:bgPr>
+        <a:solidFill>
+          <a:srgbClr val="FFFFFF"/>
+        </a:solidFill>
+        <a:effectLst/>
+      </p:bgPr>
+    </p:bg>
+    <p:spTree>
+      <p:nvGrpSpPr>
+        <p:cNvPr id="1" name=""/>
+        <p:cNvGrpSpPr/>
+        <p:nvPr/>
+      </p:nvGrpSpPr>
+      <p:grpSpPr>
+        <a:xfrm>
+          <a:off x="0" y="0"/>
+          <a:ext cx="0" cy="0"/>
+          <a:chOff x="0" y="0"/>
+          <a:chExt cx="0" cy="0"/>
+        </a:xfrm>
+      </p:grpSpPr>
+      <p:sp>
+        <p:nvSpPr>
+          <p:cNvPr id="2" name="Text 0"/>
+          <p:cNvSpPr/>
+          <p:nvPr/>
+        </p:nvSpPr>
+        <p:spPr>
+          <a:xfrm>
+            <a:off x="640080" y="411480"/>
+            <a:ext cx="10881360" cy="777240"/>
+          </a:xfrm>
+          <a:prstGeom prst="rect">
+            <a:avLst/>
+          </a:prstGeom>
+          <a:noFill/>
+          <a:ln/>
+        </p:spPr>
+        <p:txBody>
+          <a:bodyPr wrap="square" rtlCol="0" anchor="ctr"/>
+          <a:lstStyle/>
+          <a:p>
+            <a:pPr marL="0" indent="0">
+              <a:buNone/>
+            </a:pPr>
+            <a:r>
+              <a:rPr lang="en-US" sz="3000" b="1" dirty="0">
+                <a:solidFill>
+                  <a:srgbClr val="1E2A38"/>
+                </a:solidFill>
+                <a:latin typeface="Cambria" pitchFamily="34" charset="0"/>
+                <a:ea typeface="Cambria" pitchFamily="34" charset="-122"/>
+                <a:cs typeface="Cambria" pitchFamily="34" charset="-120"/>
+              </a:rPr>
+              <a:t>Můstkový usměrňovač krok za krokem</a:t>
+            </a:r>
+            <a:endParaRPr lang="en-US" sz="3000" dirty="0"/>
+          </a:p>
+        </p:txBody>
+      </p:sp>
+      <p:sp>
+        <p:nvSpPr>
+          <p:cNvPr id="3" name="Text 1"/>
+          <p:cNvSpPr/>
+          <p:nvPr/>
+        </p:nvSpPr>
+        <p:spPr>
+          <a:xfrm>
+            <a:off x="457200" y="6473952"/>
+            <a:ext cx="5486400" cy="274320"/>
+          </a:xfrm>
+          <a:prstGeom prst="rect">
+            <a:avLst/>
+          </a:prstGeom>
+          <a:noFill/>
+          <a:ln/>
+        </p:spPr>
+        <p:txBody>
+          <a:bodyPr wrap="square" rtlCol="0" anchor="ctr"/>
+          <a:lstStyle/>
+          <a:p>
+            <a:pPr marL="0" indent="0" algn="l">
+              <a:buNone/>
+            </a:pPr>
+            <a:r>
+              <a:rPr lang="en-US" sz="900" dirty="0">
+                <a:solidFill>
+                  <a:srgbClr val="5B6B78"/>
+                </a:solidFill>
+                <a:latin typeface="Calibri" pitchFamily="34" charset="0"/>
+                <a:ea typeface="Calibri" pitchFamily="34" charset="-122"/>
+                <a:cs typeface="Calibri" pitchFamily="34" charset="-120"/>
+              </a:rPr>
+              <a:t>Elektronické součástky  ·  Přednáška 2</a:t>
+            </a:r>
+            <a:endParaRPr lang="en-US" sz="900" dirty="0"/>
+          </a:p>
+        </p:txBody>
+      </p:sp>
+      <p:sp>
+        <p:nvSpPr>
+          <p:cNvPr id="4" name="Text 2"/>
+          <p:cNvSpPr/>
+          <p:nvPr/>
+        </p:nvSpPr>
+        <p:spPr>
+          <a:xfrm>
+            <a:off x="731520" y="1417320"/>
+            <a:ext cx="10607040" cy="1371600"/>
+          </a:xfrm>
+          <a:prstGeom prst="rect">
+            <a:avLst/>
+          </a:prstGeom>
+          <a:noFill/>
+          <a:ln/>
+        </p:spPr>
+        <p:txBody>
+          <a:bodyPr wrap="square" rtlCol="0" anchor="t"/>
+          <a:lstStyle/>
+          <a:p>
+            <a:pPr marL="342900" indent="-342900">
+              <a:lnSpc>
+                <a:spcPct val="112000"/>
+              </a:lnSpc>
+              <a:spcAft>
+                <a:spcPts val="1200"/>
+              </a:spcAft>
+              <a:buSzPct val="100000"/>
+              <a:buChar char="●"/>
+            </a:pPr>
+            <a:r>
+              <a:rPr lang="en-US" sz="1550" dirty="0">
+                <a:solidFill>
+                  <a:srgbClr val="1E2A38"/>
+                </a:solidFill>
+                <a:latin typeface="Calibri" pitchFamily="34" charset="0"/>
+                <a:ea typeface="Calibri" pitchFamily="34" charset="-122"/>
+                <a:cs typeface="Calibri" pitchFamily="34" charset="-120"/>
+              </a:rPr>
+              <a:t>V každé půlvlně vedou dvě protilehlé diody, zbylé dvě jsou zavřené</a:t>
+            </a:r>
+            <a:endParaRPr lang="en-US" sz="1550" dirty="0"/>
+          </a:p>
+          <a:p>
+            <a:pPr marL="342900" indent="-342900">
+              <a:lnSpc>
+                <a:spcPct val="112000"/>
+              </a:lnSpc>
+              <a:spcAft>
+                <a:spcPts val="1200"/>
+              </a:spcAft>
+              <a:buSzPct val="100000"/>
+              <a:buChar char="●"/>
+            </a:pPr>
+            <a:r>
+              <a:rPr lang="en-US" sz="1550" dirty="0">
+                <a:solidFill>
+                  <a:srgbClr val="1E2A38"/>
+                </a:solidFill>
+                <a:latin typeface="Calibri" pitchFamily="34" charset="0"/>
+                <a:ea typeface="Calibri" pitchFamily="34" charset="-122"/>
+                <a:cs typeface="Calibri" pitchFamily="34" charset="-120"/>
+              </a:rPr>
+              <a:t>Proud zátěží teče v obou půlvlnách stejným směrem – výstup má stálou polaritu</a:t>
+            </a:r>
+            <a:endParaRPr lang="en-US" sz="1550" dirty="0"/>
+          </a:p>
+          <a:p>
+            <a:pPr marL="342900" indent="-342900">
+              <a:lnSpc>
+                <a:spcPct val="112000"/>
+              </a:lnSpc>
+              <a:spcAft>
+                <a:spcPts val="1200"/>
+              </a:spcAft>
+              <a:buSzPct val="100000"/>
+              <a:buChar char="●"/>
+            </a:pPr>
+            <a:r>
+              <a:rPr lang="en-US" sz="1550" dirty="0">
+                <a:solidFill>
+                  <a:srgbClr val="1E2A38"/>
+                </a:solidFill>
+                <a:latin typeface="Calibri" pitchFamily="34" charset="0"/>
+                <a:ea typeface="Calibri" pitchFamily="34" charset="-122"/>
+                <a:cs typeface="Calibri" pitchFamily="34" charset="-120"/>
+              </a:rPr>
+              <a:t>Výstupní napětí je zvlněné (|u₁|); vyhladí ho kondenzátor paralelně k zátěži (nabíjí se ve špičce, vybíjí mezi nimi – viz RC obvod)</a:t>
+            </a:r>
+            <a:endParaRPr lang="en-US" sz="1550" dirty="0"/>
+          </a:p>
+        </p:txBody>
+      </p:sp>
+      <p:sp>
+        <p:nvSpPr>
+          <p:cNvPr id="5" name="Rounded Rectangle 4"/>
+          <p:cNvSpPr/>
+          <p:nvPr/>
+        </p:nvSpPr>
+        <p:spPr>
+          <a:xfrm>
+            <a:off x="2956777" y="2724912"/>
+            <a:ext cx="6247964" cy="3739896"/>
+          </a:xfrm>
+          <a:prstGeom prst="roundRect">
+            <a:avLst>
+              <a:gd name="adj" fmla="val 4000"/>
+            </a:avLst>
+          </a:prstGeom>
+          <a:solidFill>
+            <a:srgbClr val="F3F5F7"/>
+          </a:solidFill>
+          <a:ln w="12700">
+            <a:solidFill>
+              <a:srgbClr val="E3E7EB"/>
+            </a:solidFill>
+          </a:ln>
+          <a:effectLst/>
+        </p:spPr>
+        <p:style>
+          <a:lnRef idx="1">
+            <a:schemeClr val="accent1"/>
+          </a:lnRef>
+          <a:fillRef idx="3">
+            <a:schemeClr val="accent1"/>
+          </a:fillRef>
+          <a:effectRef idx="2">
+            <a:schemeClr val="accent1"/>
+          </a:effectRef>
+          <a:fontRef idx="minor">
+            <a:schemeClr val="lt1"/>
+          </a:fontRef>
+        </p:style>
+        <p:txBody>
+          <a:bodyPr rtlCol="0" anchor="ctr"/>
+          <a:lstStyle/>
+          <a:p>
+            <a:pPr algn="ctr"/>
+            <a:endParaRPr/>
+          </a:p>
+        </p:txBody>
+      </p:sp>
+      <p:pic>
+        <p:nvPicPr>
+          <p:cNvPr id="6" name="Picture 5" descr="mustkovy_usmernovac.gif"/>
+          <p:cNvPicPr>
+            <a:picLocks noChangeAspect="1"/>
+          </p:cNvPicPr>
+          <p:nvPr/>
+        </p:nvPicPr>
+        <p:blipFill>
+          <a:blip r:embed="rId3"/>
+          <a:stretch>
+            <a:fillRect/>
+          </a:stretch>
+        </p:blipFill>
+        <p:spPr>
+          <a:xfrm>
+            <a:off x="3066505" y="2834640"/>
+            <a:ext cx="6028508" cy="3246120"/>
+          </a:xfrm>
+          <a:prstGeom prst="rect">
+            <a:avLst/>
+          </a:prstGeom>
+        </p:spPr>
+      </p:pic>
+      <p:sp>
+        <p:nvSpPr>
+          <p:cNvPr id="7" name="TextBox 6"/>
+          <p:cNvSpPr txBox="1"/>
+          <p:nvPr/>
+        </p:nvSpPr>
+        <p:spPr>
+          <a:xfrm>
+            <a:off x="2956777" y="6099048"/>
+            <a:ext cx="6247964" cy="292608"/>
+          </a:xfrm>
+          <a:prstGeom prst="rect">
+            <a:avLst/>
+          </a:prstGeom>
+          <a:noFill/>
+        </p:spPr>
+        <p:txBody>
+          <a:bodyPr wrap="none" lIns="0" rIns="0">
+            <a:spAutoFit/>
+          </a:bodyPr>
+          <a:lstStyle/>
+          <a:p>
+            <a:pPr algn="ctr"/>
+            <a:r>
+              <a:rPr sz="1000" i="1">
+                <a:solidFill>
+                  <a:srgbClr val="5B6B78"/>
+                </a:solidFill>
+                <a:latin typeface="Calibri"/>
+              </a:rPr>
+              <a:t>animace – přehraje se v režimu prezentace (nejprve celkový pohled, pak jedna perioda krok za krokem)</a:t>
+            </a:r>
+          </a:p>
+        </p:txBody>
+      </p:sp>
+    </p:spTree>
+  </p:cSld>
+  <p:clrMapOvr>
+    <a:masterClrMapping/>
+  </p:clrMapOvr>
+</p:sld>
+</file>
+
+<file path=ppt/slides/slide51.xml><?xml version="1.0" encoding="utf-8"?>
+<p:sld xmlns:a="http://schemas.openxmlformats.org/drawingml/2006/main" xmlns:r="http://schemas.openxmlformats.org/officeDocument/2006/relationships" xmlns:p="http://schemas.openxmlformats.org/presentationml/2006/main">
   <p:cSld name="Slide 46">
     <p:bg>
       <p:bgPr>
@@ -49752,7 +49995,7 @@
 </p:sld>
 </file>
 
-<file path=ppt/slides/slide51.xml><?xml version="1.0" encoding="utf-8"?>
+<file path=ppt/slides/slide52.xml><?xml version="1.0" encoding="utf-8"?>
 <p:sld xmlns:a="http://schemas.openxmlformats.org/drawingml/2006/main" xmlns:r="http://schemas.openxmlformats.org/officeDocument/2006/relationships" xmlns:p="http://schemas.openxmlformats.org/presentationml/2006/main">
   <p:cSld name="Slide 47">
     <p:bg>
@@ -50149,7 +50392,7 @@
 </p:sld>
 </file>
 
-<file path=ppt/slides/slide52.xml><?xml version="1.0" encoding="utf-8"?>
+<file path=ppt/slides/slide53.xml><?xml version="1.0" encoding="utf-8"?>
 <p:sld xmlns:a="http://schemas.openxmlformats.org/drawingml/2006/main" xmlns:r="http://schemas.openxmlformats.org/officeDocument/2006/relationships" xmlns:p="http://schemas.openxmlformats.org/presentationml/2006/main">
   <p:cSld name="Slide 48">
     <p:bg>
@@ -50411,7 +50654,7 @@
 </p:sld>
 </file>
 
-<file path=ppt/slides/slide53.xml><?xml version="1.0" encoding="utf-8"?>
+<file path=ppt/slides/slide54.xml><?xml version="1.0" encoding="utf-8"?>
 <p:sld xmlns:a="http://schemas.openxmlformats.org/drawingml/2006/main" xmlns:r="http://schemas.openxmlformats.org/officeDocument/2006/relationships" xmlns:p="http://schemas.openxmlformats.org/presentationml/2006/main">
   <p:cSld name="Slide 49">
     <p:bg>
@@ -52263,7 +52506,7 @@
 </p:sld>
 </file>
 
-<file path=ppt/slides/slide54.xml><?xml version="1.0" encoding="utf-8"?>
+<file path=ppt/slides/slide55.xml><?xml version="1.0" encoding="utf-8"?>
 <p:sld xmlns:a="http://schemas.openxmlformats.org/drawingml/2006/main" xmlns:r="http://schemas.openxmlformats.org/officeDocument/2006/relationships" xmlns:p="http://schemas.openxmlformats.org/presentationml/2006/main">
   <p:cSld name="Slide 50">
     <p:bg>
@@ -52549,7 +52792,7 @@
 </p:sld>
 </file>
 
-<file path=ppt/slides/slide55.xml><?xml version="1.0" encoding="utf-8"?>
+<file path=ppt/slides/slide56.xml><?xml version="1.0" encoding="utf-8"?>
 <p:sld xmlns:a="http://schemas.openxmlformats.org/drawingml/2006/main" xmlns:r="http://schemas.openxmlformats.org/officeDocument/2006/relationships" xmlns:p="http://schemas.openxmlformats.org/presentationml/2006/main">
   <p:cSld name="Slide 51">
     <p:bg>
@@ -53006,7 +53249,7 @@
 </p:sld>
 </file>
 
-<file path=ppt/slides/slide56.xml><?xml version="1.0" encoding="utf-8"?>
+<file path=ppt/slides/slide57.xml><?xml version="1.0" encoding="utf-8"?>
 <p:sld xmlns:a="http://schemas.openxmlformats.org/drawingml/2006/main" xmlns:r="http://schemas.openxmlformats.org/officeDocument/2006/relationships" xmlns:p="http://schemas.openxmlformats.org/presentationml/2006/main">
   <p:cSld name="Slide 52">
     <p:bg>
@@ -53537,7 +53780,7 @@
 </p:sld>
 </file>
 
-<file path=ppt/slides/slide57.xml><?xml version="1.0" encoding="utf-8"?>
+<file path=ppt/slides/slide58.xml><?xml version="1.0" encoding="utf-8"?>
 <p:sld xmlns:a="http://schemas.openxmlformats.org/drawingml/2006/main" xmlns:r="http://schemas.openxmlformats.org/officeDocument/2006/relationships" xmlns:p="http://schemas.openxmlformats.org/presentationml/2006/main">
   <p:cSld name="Slide 53">
     <p:bg>
@@ -53799,7 +54042,7 @@
 </p:sld>
 </file>
 
-<file path=ppt/slides/slide58.xml><?xml version="1.0" encoding="utf-8"?>
+<file path=ppt/slides/slide59.xml><?xml version="1.0" encoding="utf-8"?>
 <p:sld xmlns:a="http://schemas.openxmlformats.org/drawingml/2006/main" xmlns:r="http://schemas.openxmlformats.org/officeDocument/2006/relationships" xmlns:p="http://schemas.openxmlformats.org/presentationml/2006/main">
   <p:cSld name="Slide 54">
     <p:bg>
@@ -54214,312 +54457,6 @@
           <a:xfrm>
             <a:off x="7222070" y="3200400"/>
             <a:ext cx="3066620" cy="2331720"/>
-          </a:xfrm>
-          <a:prstGeom prst="rect">
-            <a:avLst/>
-          </a:prstGeom>
-        </p:spPr>
-      </p:pic>
-    </p:spTree>
-  </p:cSld>
-  <p:clrMapOvr>
-    <a:masterClrMapping/>
-  </p:clrMapOvr>
-</p:sld>
-</file>
-
-<file path=ppt/slides/slide59.xml><?xml version="1.0" encoding="utf-8"?>
-<p:sld xmlns:a="http://schemas.openxmlformats.org/drawingml/2006/main" xmlns:r="http://schemas.openxmlformats.org/officeDocument/2006/relationships" xmlns:p="http://schemas.openxmlformats.org/presentationml/2006/main">
-  <p:cSld name="Slide 55">
-    <p:bg>
-      <p:bgPr>
-        <a:solidFill>
-          <a:srgbClr val="FFFFFF"/>
-        </a:solidFill>
-        <a:effectLst/>
-      </p:bgPr>
-    </p:bg>
-    <p:spTree>
-      <p:nvGrpSpPr>
-        <p:cNvPr id="1" name=""/>
-        <p:cNvGrpSpPr/>
-        <p:nvPr/>
-      </p:nvGrpSpPr>
-      <p:grpSpPr>
-        <a:xfrm>
-          <a:off x="0" y="0"/>
-          <a:ext cx="0" cy="0"/>
-          <a:chOff x="0" y="0"/>
-          <a:chExt cx="0" cy="0"/>
-        </a:xfrm>
-      </p:grpSpPr>
-      <p:sp>
-        <p:nvSpPr>
-          <p:cNvPr id="2" name="Text 0"/>
-          <p:cNvSpPr/>
-          <p:nvPr/>
-        </p:nvSpPr>
-        <p:spPr>
-          <a:xfrm>
-            <a:off x="640080" y="411480"/>
-            <a:ext cx="10881360" cy="777240"/>
-          </a:xfrm>
-          <a:prstGeom prst="rect">
-            <a:avLst/>
-          </a:prstGeom>
-          <a:noFill/>
-          <a:ln/>
-        </p:spPr>
-        <p:txBody>
-          <a:bodyPr wrap="square" rtlCol="0" anchor="ctr"/>
-          <a:lstStyle/>
-          <a:p>
-            <a:pPr marL="0" indent="0">
-              <a:buNone/>
-            </a:pPr>
-            <a:r>
-              <a:rPr lang="en-US" sz="3000" b="1" dirty="0">
-                <a:solidFill>
-                  <a:srgbClr val="1E2A38"/>
-                </a:solidFill>
-                <a:latin typeface="Cambria" pitchFamily="34" charset="0"/>
-                <a:ea typeface="Cambria" pitchFamily="34" charset="-122"/>
-                <a:cs typeface="Cambria" pitchFamily="34" charset="-120"/>
-              </a:rPr>
-              <a:t>Diferenční zesilovač</a:t>
-            </a:r>
-            <a:endParaRPr lang="en-US" sz="3000" dirty="0"/>
-          </a:p>
-        </p:txBody>
-      </p:sp>
-      <p:sp>
-        <p:nvSpPr>
-          <p:cNvPr id="3" name="Text 1"/>
-          <p:cNvSpPr/>
-          <p:nvPr/>
-        </p:nvSpPr>
-        <p:spPr>
-          <a:xfrm>
-            <a:off x="457200" y="6473952"/>
-            <a:ext cx="5486400" cy="274320"/>
-          </a:xfrm>
-          <a:prstGeom prst="rect">
-            <a:avLst/>
-          </a:prstGeom>
-          <a:noFill/>
-          <a:ln/>
-        </p:spPr>
-        <p:txBody>
-          <a:bodyPr wrap="square" rtlCol="0" anchor="ctr"/>
-          <a:lstStyle/>
-          <a:p>
-            <a:pPr marL="0" indent="0" algn="l">
-              <a:buNone/>
-            </a:pPr>
-            <a:r>
-              <a:rPr lang="en-US" sz="900" dirty="0">
-                <a:solidFill>
-                  <a:srgbClr val="5B6B78"/>
-                </a:solidFill>
-                <a:latin typeface="Calibri" pitchFamily="34" charset="0"/>
-                <a:ea typeface="Calibri" pitchFamily="34" charset="-122"/>
-                <a:cs typeface="Calibri" pitchFamily="34" charset="-120"/>
-              </a:rPr>
-              <a:t>Elektronické součástky  ·  Přednáška 2</a:t>
-            </a:r>
-            <a:endParaRPr lang="en-US" sz="900" dirty="0"/>
-          </a:p>
-        </p:txBody>
-      </p:sp>
-      <p:sp>
-        <p:nvSpPr>
-          <p:cNvPr id="4" name="Text 2"/>
-          <p:cNvSpPr/>
-          <p:nvPr/>
-        </p:nvSpPr>
-        <p:spPr>
-          <a:xfrm>
-            <a:off x="731520" y="1554480"/>
-            <a:ext cx="6035040" cy="3383280"/>
-          </a:xfrm>
-          <a:prstGeom prst="rect">
-            <a:avLst/>
-          </a:prstGeom>
-          <a:noFill/>
-          <a:ln/>
-        </p:spPr>
-        <p:txBody>
-          <a:bodyPr wrap="square" rtlCol="0" anchor="t"/>
-          <a:lstStyle/>
-          <a:p>
-            <a:pPr marL="342900" indent="-342900">
-              <a:lnSpc>
-                <a:spcPct val="112000"/>
-              </a:lnSpc>
-              <a:spcAft>
-                <a:spcPts val="1200"/>
-              </a:spcAft>
-              <a:buSzPct val="100000"/>
-              <a:buChar char="●"/>
-            </a:pPr>
-            <a:r>
-              <a:rPr lang="en-US" sz="1550" dirty="0">
-                <a:solidFill>
-                  <a:srgbClr val="1E2A38"/>
-                </a:solidFill>
-                <a:latin typeface="Calibri" pitchFamily="34" charset="0"/>
-                <a:ea typeface="Calibri" pitchFamily="34" charset="-122"/>
-                <a:cs typeface="Calibri" pitchFamily="34" charset="-120"/>
-              </a:rPr>
-              <a:t>Slouží ke sledování rozdílu dvou napěťových signálů s velmi blízkými hodnotami</a:t>
-            </a:r>
-            <a:endParaRPr lang="en-US" sz="1550" dirty="0"/>
-          </a:p>
-          <a:p>
-            <a:pPr marL="342900" indent="-342900">
-              <a:lnSpc>
-                <a:spcPct val="112000"/>
-              </a:lnSpc>
-              <a:spcAft>
-                <a:spcPts val="1200"/>
-              </a:spcAft>
-              <a:buSzPct val="100000"/>
-              <a:buChar char="●"/>
-            </a:pPr>
-            <a:r>
-              <a:rPr lang="en-US" sz="1550" dirty="0">
-                <a:solidFill>
-                  <a:srgbClr val="1E2A38"/>
-                </a:solidFill>
-                <a:latin typeface="Calibri" pitchFamily="34" charset="0"/>
-                <a:ea typeface="Calibri" pitchFamily="34" charset="-122"/>
-                <a:cs typeface="Calibri" pitchFamily="34" charset="-120"/>
-              </a:rPr>
-              <a:t>Podmínka funkce: Rzp/R₁ = R₂/R₃</a:t>
-            </a:r>
-            <a:endParaRPr lang="en-US" sz="1550" dirty="0"/>
-          </a:p>
-        </p:txBody>
-      </p:sp>
-      <p:sp>
-        <p:nvSpPr>
-          <p:cNvPr id="5" name="Shape 3"/>
-          <p:cNvSpPr/>
-          <p:nvPr/>
-        </p:nvSpPr>
-        <p:spPr>
-          <a:xfrm>
-            <a:off x="731520" y="5029200"/>
-            <a:ext cx="4023360" cy="777240"/>
-          </a:xfrm>
-          <a:prstGeom prst="roundRect">
-            <a:avLst>
-              <a:gd name="adj" fmla="val 9412"/>
-            </a:avLst>
-          </a:prstGeom>
-          <a:solidFill>
-            <a:srgbClr val="F3F5F7"/>
-          </a:solidFill>
-          <a:ln/>
-        </p:spPr>
-        <p:txBody>
-          <a:bodyPr/>
-          <a:lstStyle/>
-          <a:p>
-            <a:endParaRPr lang="cs-CZ"/>
-          </a:p>
-        </p:txBody>
-      </p:sp>
-      <p:sp>
-        <p:nvSpPr>
-          <p:cNvPr id="6" name="Text 4"/>
-          <p:cNvSpPr/>
-          <p:nvPr/>
-        </p:nvSpPr>
-        <p:spPr>
-          <a:xfrm>
-            <a:off x="960120" y="5029200"/>
-            <a:ext cx="3566160" cy="777240"/>
-          </a:xfrm>
-          <a:prstGeom prst="rect">
-            <a:avLst/>
-          </a:prstGeom>
-          <a:noFill/>
-          <a:ln/>
-        </p:spPr>
-        <p:txBody>
-          <a:bodyPr wrap="square" rtlCol="0" anchor="ctr"/>
-          <a:lstStyle/>
-          <a:p>
-            <a:pPr marL="0" indent="0" algn="l">
-              <a:buNone/>
-            </a:pPr>
-            <a:r>
-              <a:rPr lang="en-US" sz="1800" b="1" dirty="0">
-                <a:solidFill>
-                  <a:srgbClr val="8C5A26"/>
-                </a:solidFill>
-                <a:latin typeface="Cambria Math" pitchFamily="34" charset="0"/>
-                <a:ea typeface="Cambria Math" pitchFamily="34" charset="-122"/>
-                <a:cs typeface="Cambria Math" pitchFamily="34" charset="-120"/>
-              </a:rPr>
-              <a:t>U₀ = (Rzp/R₁) · (U₂ − U₁)</a:t>
-            </a:r>
-            <a:endParaRPr lang="en-US" sz="1800" dirty="0"/>
-          </a:p>
-        </p:txBody>
-      </p:sp>
-      <p:sp>
-        <p:nvSpPr>
-          <p:cNvPr id="7" name="Shape 5"/>
-          <p:cNvSpPr/>
-          <p:nvPr/>
-        </p:nvSpPr>
-        <p:spPr>
-          <a:xfrm>
-            <a:off x="7068312" y="1973919"/>
-            <a:ext cx="4517136" cy="3641683"/>
-          </a:xfrm>
-          <a:prstGeom prst="roundRect">
-            <a:avLst>
-              <a:gd name="adj" fmla="val 1507"/>
-            </a:avLst>
-          </a:prstGeom>
-          <a:solidFill>
-            <a:srgbClr val="F3F5F7"/>
-          </a:solidFill>
-          <a:ln w="12700">
-            <a:solidFill>
-              <a:srgbClr val="E3E7EB"/>
-            </a:solidFill>
-            <a:prstDash val="solid"/>
-          </a:ln>
-        </p:spPr>
-        <p:txBody>
-          <a:bodyPr/>
-          <a:lstStyle/>
-          <a:p>
-            <a:endParaRPr lang="cs-CZ"/>
-          </a:p>
-        </p:txBody>
-      </p:sp>
-      <p:pic>
-        <p:nvPicPr>
-          <p:cNvPr id="8" name="Image 0" descr="assets/oz_diferencni.png"/>
-          <p:cNvPicPr>
-            <a:picLocks noChangeAspect="1"/>
-          </p:cNvPicPr>
-          <p:nvPr/>
-        </p:nvPicPr>
-        <p:blipFill>
-          <a:blip r:embed="rId3"/>
-          <a:srcRect/>
-          <a:stretch/>
-        </p:blipFill>
-        <p:spPr>
-          <a:xfrm>
-            <a:off x="7178040" y="2083647"/>
-            <a:ext cx="4297680" cy="3422227"/>
           </a:xfrm>
           <a:prstGeom prst="rect">
             <a:avLst/>
@@ -55308,6 +55245,312 @@
 
 <file path=ppt/slides/slide60.xml><?xml version="1.0" encoding="utf-8"?>
 <p:sld xmlns:a="http://schemas.openxmlformats.org/drawingml/2006/main" xmlns:r="http://schemas.openxmlformats.org/officeDocument/2006/relationships" xmlns:p="http://schemas.openxmlformats.org/presentationml/2006/main">
+  <p:cSld name="Slide 55">
+    <p:bg>
+      <p:bgPr>
+        <a:solidFill>
+          <a:srgbClr val="FFFFFF"/>
+        </a:solidFill>
+        <a:effectLst/>
+      </p:bgPr>
+    </p:bg>
+    <p:spTree>
+      <p:nvGrpSpPr>
+        <p:cNvPr id="1" name=""/>
+        <p:cNvGrpSpPr/>
+        <p:nvPr/>
+      </p:nvGrpSpPr>
+      <p:grpSpPr>
+        <a:xfrm>
+          <a:off x="0" y="0"/>
+          <a:ext cx="0" cy="0"/>
+          <a:chOff x="0" y="0"/>
+          <a:chExt cx="0" cy="0"/>
+        </a:xfrm>
+      </p:grpSpPr>
+      <p:sp>
+        <p:nvSpPr>
+          <p:cNvPr id="2" name="Text 0"/>
+          <p:cNvSpPr/>
+          <p:nvPr/>
+        </p:nvSpPr>
+        <p:spPr>
+          <a:xfrm>
+            <a:off x="640080" y="411480"/>
+            <a:ext cx="10881360" cy="777240"/>
+          </a:xfrm>
+          <a:prstGeom prst="rect">
+            <a:avLst/>
+          </a:prstGeom>
+          <a:noFill/>
+          <a:ln/>
+        </p:spPr>
+        <p:txBody>
+          <a:bodyPr wrap="square" rtlCol="0" anchor="ctr"/>
+          <a:lstStyle/>
+          <a:p>
+            <a:pPr marL="0" indent="0">
+              <a:buNone/>
+            </a:pPr>
+            <a:r>
+              <a:rPr lang="en-US" sz="3000" b="1" dirty="0">
+                <a:solidFill>
+                  <a:srgbClr val="1E2A38"/>
+                </a:solidFill>
+                <a:latin typeface="Cambria" pitchFamily="34" charset="0"/>
+                <a:ea typeface="Cambria" pitchFamily="34" charset="-122"/>
+                <a:cs typeface="Cambria" pitchFamily="34" charset="-120"/>
+              </a:rPr>
+              <a:t>Diferenční zesilovač</a:t>
+            </a:r>
+            <a:endParaRPr lang="en-US" sz="3000" dirty="0"/>
+          </a:p>
+        </p:txBody>
+      </p:sp>
+      <p:sp>
+        <p:nvSpPr>
+          <p:cNvPr id="3" name="Text 1"/>
+          <p:cNvSpPr/>
+          <p:nvPr/>
+        </p:nvSpPr>
+        <p:spPr>
+          <a:xfrm>
+            <a:off x="457200" y="6473952"/>
+            <a:ext cx="5486400" cy="274320"/>
+          </a:xfrm>
+          <a:prstGeom prst="rect">
+            <a:avLst/>
+          </a:prstGeom>
+          <a:noFill/>
+          <a:ln/>
+        </p:spPr>
+        <p:txBody>
+          <a:bodyPr wrap="square" rtlCol="0" anchor="ctr"/>
+          <a:lstStyle/>
+          <a:p>
+            <a:pPr marL="0" indent="0" algn="l">
+              <a:buNone/>
+            </a:pPr>
+            <a:r>
+              <a:rPr lang="en-US" sz="900" dirty="0">
+                <a:solidFill>
+                  <a:srgbClr val="5B6B78"/>
+                </a:solidFill>
+                <a:latin typeface="Calibri" pitchFamily="34" charset="0"/>
+                <a:ea typeface="Calibri" pitchFamily="34" charset="-122"/>
+                <a:cs typeface="Calibri" pitchFamily="34" charset="-120"/>
+              </a:rPr>
+              <a:t>Elektronické součástky  ·  Přednáška 2</a:t>
+            </a:r>
+            <a:endParaRPr lang="en-US" sz="900" dirty="0"/>
+          </a:p>
+        </p:txBody>
+      </p:sp>
+      <p:sp>
+        <p:nvSpPr>
+          <p:cNvPr id="4" name="Text 2"/>
+          <p:cNvSpPr/>
+          <p:nvPr/>
+        </p:nvSpPr>
+        <p:spPr>
+          <a:xfrm>
+            <a:off x="731520" y="1554480"/>
+            <a:ext cx="6035040" cy="3383280"/>
+          </a:xfrm>
+          <a:prstGeom prst="rect">
+            <a:avLst/>
+          </a:prstGeom>
+          <a:noFill/>
+          <a:ln/>
+        </p:spPr>
+        <p:txBody>
+          <a:bodyPr wrap="square" rtlCol="0" anchor="t"/>
+          <a:lstStyle/>
+          <a:p>
+            <a:pPr marL="342900" indent="-342900">
+              <a:lnSpc>
+                <a:spcPct val="112000"/>
+              </a:lnSpc>
+              <a:spcAft>
+                <a:spcPts val="1200"/>
+              </a:spcAft>
+              <a:buSzPct val="100000"/>
+              <a:buChar char="●"/>
+            </a:pPr>
+            <a:r>
+              <a:rPr lang="en-US" sz="1550" dirty="0">
+                <a:solidFill>
+                  <a:srgbClr val="1E2A38"/>
+                </a:solidFill>
+                <a:latin typeface="Calibri" pitchFamily="34" charset="0"/>
+                <a:ea typeface="Calibri" pitchFamily="34" charset="-122"/>
+                <a:cs typeface="Calibri" pitchFamily="34" charset="-120"/>
+              </a:rPr>
+              <a:t>Slouží ke sledování rozdílu dvou napěťových signálů s velmi blízkými hodnotami</a:t>
+            </a:r>
+            <a:endParaRPr lang="en-US" sz="1550" dirty="0"/>
+          </a:p>
+          <a:p>
+            <a:pPr marL="342900" indent="-342900">
+              <a:lnSpc>
+                <a:spcPct val="112000"/>
+              </a:lnSpc>
+              <a:spcAft>
+                <a:spcPts val="1200"/>
+              </a:spcAft>
+              <a:buSzPct val="100000"/>
+              <a:buChar char="●"/>
+            </a:pPr>
+            <a:r>
+              <a:rPr lang="en-US" sz="1550" dirty="0">
+                <a:solidFill>
+                  <a:srgbClr val="1E2A38"/>
+                </a:solidFill>
+                <a:latin typeface="Calibri" pitchFamily="34" charset="0"/>
+                <a:ea typeface="Calibri" pitchFamily="34" charset="-122"/>
+                <a:cs typeface="Calibri" pitchFamily="34" charset="-120"/>
+              </a:rPr>
+              <a:t>Podmínka funkce: Rzp/R₁ = R₂/R₃</a:t>
+            </a:r>
+            <a:endParaRPr lang="en-US" sz="1550" dirty="0"/>
+          </a:p>
+        </p:txBody>
+      </p:sp>
+      <p:sp>
+        <p:nvSpPr>
+          <p:cNvPr id="5" name="Shape 3"/>
+          <p:cNvSpPr/>
+          <p:nvPr/>
+        </p:nvSpPr>
+        <p:spPr>
+          <a:xfrm>
+            <a:off x="731520" y="5029200"/>
+            <a:ext cx="4023360" cy="777240"/>
+          </a:xfrm>
+          <a:prstGeom prst="roundRect">
+            <a:avLst>
+              <a:gd name="adj" fmla="val 9412"/>
+            </a:avLst>
+          </a:prstGeom>
+          <a:solidFill>
+            <a:srgbClr val="F3F5F7"/>
+          </a:solidFill>
+          <a:ln/>
+        </p:spPr>
+        <p:txBody>
+          <a:bodyPr/>
+          <a:lstStyle/>
+          <a:p>
+            <a:endParaRPr lang="cs-CZ"/>
+          </a:p>
+        </p:txBody>
+      </p:sp>
+      <p:sp>
+        <p:nvSpPr>
+          <p:cNvPr id="6" name="Text 4"/>
+          <p:cNvSpPr/>
+          <p:nvPr/>
+        </p:nvSpPr>
+        <p:spPr>
+          <a:xfrm>
+            <a:off x="960120" y="5029200"/>
+            <a:ext cx="3566160" cy="777240"/>
+          </a:xfrm>
+          <a:prstGeom prst="rect">
+            <a:avLst/>
+          </a:prstGeom>
+          <a:noFill/>
+          <a:ln/>
+        </p:spPr>
+        <p:txBody>
+          <a:bodyPr wrap="square" rtlCol="0" anchor="ctr"/>
+          <a:lstStyle/>
+          <a:p>
+            <a:pPr marL="0" indent="0" algn="l">
+              <a:buNone/>
+            </a:pPr>
+            <a:r>
+              <a:rPr lang="en-US" sz="1800" b="1" dirty="0">
+                <a:solidFill>
+                  <a:srgbClr val="8C5A26"/>
+                </a:solidFill>
+                <a:latin typeface="Cambria Math" pitchFamily="34" charset="0"/>
+                <a:ea typeface="Cambria Math" pitchFamily="34" charset="-122"/>
+                <a:cs typeface="Cambria Math" pitchFamily="34" charset="-120"/>
+              </a:rPr>
+              <a:t>U₀ = (Rzp/R₁) · (U₂ − U₁)</a:t>
+            </a:r>
+            <a:endParaRPr lang="en-US" sz="1800" dirty="0"/>
+          </a:p>
+        </p:txBody>
+      </p:sp>
+      <p:sp>
+        <p:nvSpPr>
+          <p:cNvPr id="7" name="Shape 5"/>
+          <p:cNvSpPr/>
+          <p:nvPr/>
+        </p:nvSpPr>
+        <p:spPr>
+          <a:xfrm>
+            <a:off x="7068312" y="1973919"/>
+            <a:ext cx="4517136" cy="3641683"/>
+          </a:xfrm>
+          <a:prstGeom prst="roundRect">
+            <a:avLst>
+              <a:gd name="adj" fmla="val 1507"/>
+            </a:avLst>
+          </a:prstGeom>
+          <a:solidFill>
+            <a:srgbClr val="F3F5F7"/>
+          </a:solidFill>
+          <a:ln w="12700">
+            <a:solidFill>
+              <a:srgbClr val="E3E7EB"/>
+            </a:solidFill>
+            <a:prstDash val="solid"/>
+          </a:ln>
+        </p:spPr>
+        <p:txBody>
+          <a:bodyPr/>
+          <a:lstStyle/>
+          <a:p>
+            <a:endParaRPr lang="cs-CZ"/>
+          </a:p>
+        </p:txBody>
+      </p:sp>
+      <p:pic>
+        <p:nvPicPr>
+          <p:cNvPr id="8" name="Image 0" descr="assets/oz_diferencni.png"/>
+          <p:cNvPicPr>
+            <a:picLocks noChangeAspect="1"/>
+          </p:cNvPicPr>
+          <p:nvPr/>
+        </p:nvPicPr>
+        <p:blipFill>
+          <a:blip r:embed="rId3"/>
+          <a:srcRect/>
+          <a:stretch/>
+        </p:blipFill>
+        <p:spPr>
+          <a:xfrm>
+            <a:off x="7178040" y="2083647"/>
+            <a:ext cx="4297680" cy="3422227"/>
+          </a:xfrm>
+          <a:prstGeom prst="rect">
+            <a:avLst/>
+          </a:prstGeom>
+        </p:spPr>
+      </p:pic>
+    </p:spTree>
+  </p:cSld>
+  <p:clrMapOvr>
+    <a:masterClrMapping/>
+  </p:clrMapOvr>
+</p:sld>
+</file>
+
+<file path=ppt/slides/slide61.xml><?xml version="1.0" encoding="utf-8"?>
+<p:sld xmlns:a="http://schemas.openxmlformats.org/drawingml/2006/main" xmlns:r="http://schemas.openxmlformats.org/officeDocument/2006/relationships" xmlns:p="http://schemas.openxmlformats.org/presentationml/2006/main">
   <p:cSld name="Slide 56">
     <p:bg>
       <p:bgPr>
@@ -55601,7 +55844,7 @@
 </p:sld>
 </file>
 
-<file path=ppt/slides/slide61.xml><?xml version="1.0" encoding="utf-8"?>
+<file path=ppt/slides/slide62.xml><?xml version="1.0" encoding="utf-8"?>
 <p:sld xmlns:a="http://schemas.openxmlformats.org/drawingml/2006/main" xmlns:r="http://schemas.openxmlformats.org/officeDocument/2006/relationships" xmlns:p="http://schemas.openxmlformats.org/presentationml/2006/main">
   <p:cSld name="Slide 57">
     <p:bg>
